--- a/archive/2026-09-30/taobao/PPT报告/淘宝同行爆款分析-2026-09-30.pptx
+++ b/archive/2026-09-30/taobao/PPT报告/淘宝同行爆款分析-2026-09-30.pptx
@@ -6,16 +6,6 @@
   </p:sldMasterIdLst>
   <p:sldIdLst>
     <p:sldId id="256" r:id="rId7"/>
-    <p:sldId id="257" r:id="rId8"/>
-    <p:sldId id="258" r:id="rId9"/>
-    <p:sldId id="259" r:id="rId10"/>
-    <p:sldId id="260" r:id="rId11"/>
-    <p:sldId id="261" r:id="rId12"/>
-    <p:sldId id="262" r:id="rId13"/>
-    <p:sldId id="263" r:id="rId14"/>
-    <p:sldId id="264" r:id="rId15"/>
-    <p:sldId id="265" r:id="rId16"/>
-    <p:sldId id="266" r:id="rId17"/>
   </p:sldIdLst>
   <p:sldSz cx="12191695" cy="6858000" type="screen4x3"/>
   <p:notesSz cx="6858000" cy="9144000"/>
@@ -3133,943 +3123,7 @@
               <a:defRPr sz="1800"/>
             </a:pPr>
             <a:r>
-              <a:t>2026-09-30  ·  10 个商品</a:t>
-            </a:r>
-          </a:p>
-        </p:txBody>
-      </p:sp>
-      <p:sp>
-        <p:nvSpPr>
-          <p:cNvPr id="3" name="TextBox 2"/>
-          <p:cNvSpPr txBox="1"/>
-          <p:nvPr/>
-        </p:nvSpPr>
-        <p:spPr>
-          <a:xfrm>
-            <a:off x="731520" y="4206240"/>
-            <a:ext cx="10698480" cy="548640"/>
-          </a:xfrm>
-          <a:prstGeom prst="rect">
-            <a:avLst/>
-          </a:prstGeom>
-          <a:noFill/>
-        </p:spPr>
-        <p:txBody>
-          <a:bodyPr wrap="none">
-            <a:spAutoFit/>
-          </a:bodyPr>
-          <a:lstStyle/>
-          <a:p/>
-          <a:p>
-            <a:pPr>
-              <a:defRPr sz="1400">
-                <a:solidFill>
-                  <a:srgbClr val="C06040"/>
-                </a:solidFill>
-              </a:defRPr>
-            </a:pPr>
-            <a:r>
-              <a:t>* 本页为【演示数据】，仅用于验证链路</a:t>
-            </a:r>
-          </a:p>
-        </p:txBody>
-      </p:sp>
-    </p:spTree>
-  </p:cSld>
-  <p:clrMapOvr>
-    <a:masterClrMapping/>
-  </p:clrMapOvr>
-</p:sld>
-</file>
-
-<file path=ppt/slides/slide10.xml><?xml version="1.0" encoding="utf-8"?>
-<p:sld xmlns:a="http://schemas.openxmlformats.org/drawingml/2006/main" xmlns:p="http://schemas.openxmlformats.org/presentationml/2006/main" xmlns:r="http://schemas.openxmlformats.org/officeDocument/2006/relationships">
-  <p:cSld>
-    <p:spTree>
-      <p:nvGrpSpPr>
-        <p:cNvPr id="1" name=""/>
-        <p:cNvGrpSpPr/>
-        <p:nvPr/>
-      </p:nvGrpSpPr>
-      <p:grpSpPr/>
-      <p:sp>
-        <p:nvSpPr>
-          <p:cNvPr id="2" name="TextBox 1"/>
-          <p:cNvSpPr txBox="1"/>
-          <p:nvPr/>
-        </p:nvSpPr>
-        <p:spPr>
-          <a:xfrm>
-            <a:off x="548640" y="365760"/>
-            <a:ext cx="11064240" cy="6126480"/>
-          </a:xfrm>
-          <a:prstGeom prst="rect">
-            <a:avLst/>
-          </a:prstGeom>
-          <a:noFill/>
-        </p:spPr>
-        <p:txBody>
-          <a:bodyPr wrap="square">
-            <a:spAutoFit/>
-          </a:bodyPr>
-          <a:lstStyle/>
-          <a:p/>
-          <a:p>
-            <a:pPr>
-              <a:defRPr sz="1800" b="1"/>
-            </a:pPr>
-            <a:r>
-              <a:t>#9  [演示] 摸金陪玩 同行款 3号 摸金陪玩装备</a:t>
-            </a:r>
-          </a:p>
-          <a:p>
-            <a:pPr>
-              <a:defRPr sz="1400"/>
-            </a:pPr>
-            <a:r>
-              <a:t>价格：24.9    销量/想要：300</a:t>
-            </a:r>
-          </a:p>
-          <a:p>
-            <a:pPr>
-              <a:defRPr sz="1400"/>
-            </a:pPr>
-            <a:r>
-              <a:t>店铺/卖家：演示店铺3    发货地：浙江杭州</a:t>
-            </a:r>
-          </a:p>
-          <a:p>
-            <a:pPr>
-              <a:defRPr sz="1400"/>
-            </a:pPr>
-            <a:r>
-              <a:t>SKU：详情页为演示地址或无详情链接</a:t>
-            </a:r>
-          </a:p>
-          <a:p>
-            <a:pPr>
-              <a:defRPr sz="1400"/>
-            </a:pPr>
-            <a:r>
-              <a:t>卖点：装备包撤离、首单免费</a:t>
-            </a:r>
-          </a:p>
-          <a:p>
-            <a:pPr>
-              <a:defRPr sz="1400"/>
-            </a:pPr>
-            <a:r>
-              <a:t>链接：https://example.invalid/demo/taobao/9</a:t>
-            </a:r>
-          </a:p>
-        </p:txBody>
-      </p:sp>
-    </p:spTree>
-  </p:cSld>
-  <p:clrMapOvr>
-    <a:masterClrMapping/>
-  </p:clrMapOvr>
-</p:sld>
-</file>
-
-<file path=ppt/slides/slide11.xml><?xml version="1.0" encoding="utf-8"?>
-<p:sld xmlns:a="http://schemas.openxmlformats.org/drawingml/2006/main" xmlns:p="http://schemas.openxmlformats.org/presentationml/2006/main" xmlns:r="http://schemas.openxmlformats.org/officeDocument/2006/relationships">
-  <p:cSld>
-    <p:spTree>
-      <p:nvGrpSpPr>
-        <p:cNvPr id="1" name=""/>
-        <p:cNvGrpSpPr/>
-        <p:nvPr/>
-      </p:nvGrpSpPr>
-      <p:grpSpPr/>
-      <p:sp>
-        <p:nvSpPr>
-          <p:cNvPr id="2" name="TextBox 1"/>
-          <p:cNvSpPr txBox="1"/>
-          <p:nvPr/>
-        </p:nvSpPr>
-        <p:spPr>
-          <a:xfrm>
-            <a:off x="548640" y="365760"/>
-            <a:ext cx="11064240" cy="6126480"/>
-          </a:xfrm>
-          <a:prstGeom prst="rect">
-            <a:avLst/>
-          </a:prstGeom>
-          <a:noFill/>
-        </p:spPr>
-        <p:txBody>
-          <a:bodyPr wrap="square">
-            <a:spAutoFit/>
-          </a:bodyPr>
-          <a:lstStyle/>
-          <a:p/>
-          <a:p>
-            <a:pPr>
-              <a:defRPr sz="1800" b="1"/>
-            </a:pPr>
-            <a:r>
-              <a:t>#10  [演示] 超自然行动组 同行款 1号 摸金陪玩装备</a:t>
-            </a:r>
-          </a:p>
-          <a:p>
-            <a:pPr>
-              <a:defRPr sz="1400"/>
-            </a:pPr>
-            <a:r>
-              <a:t>价格：14.9    销量/想要：100</a:t>
-            </a:r>
-          </a:p>
-          <a:p>
-            <a:pPr>
-              <a:defRPr sz="1400"/>
-            </a:pPr>
-            <a:r>
-              <a:t>店铺/卖家：演示店铺1    发货地：浙江杭州</a:t>
-            </a:r>
-          </a:p>
-          <a:p>
-            <a:pPr>
-              <a:defRPr sz="1400"/>
-            </a:pPr>
-            <a:r>
-              <a:t>SKU：详情页为演示地址或无详情链接</a:t>
-            </a:r>
-          </a:p>
-          <a:p>
-            <a:pPr>
-              <a:defRPr sz="1400"/>
-            </a:pPr>
-            <a:r>
-              <a:t>卖点：装备包撤离、首单免费</a:t>
-            </a:r>
-          </a:p>
-          <a:p>
-            <a:pPr>
-              <a:defRPr sz="1400"/>
-            </a:pPr>
-            <a:r>
-              <a:t>链接：https://example.invalid/demo/taobao/10</a:t>
-            </a:r>
-          </a:p>
-        </p:txBody>
-      </p:sp>
-    </p:spTree>
-  </p:cSld>
-  <p:clrMapOvr>
-    <a:masterClrMapping/>
-  </p:clrMapOvr>
-</p:sld>
-</file>
-
-<file path=ppt/slides/slide2.xml><?xml version="1.0" encoding="utf-8"?>
-<p:sld xmlns:a="http://schemas.openxmlformats.org/drawingml/2006/main" xmlns:p="http://schemas.openxmlformats.org/presentationml/2006/main" xmlns:r="http://schemas.openxmlformats.org/officeDocument/2006/relationships">
-  <p:cSld>
-    <p:spTree>
-      <p:nvGrpSpPr>
-        <p:cNvPr id="1" name=""/>
-        <p:cNvGrpSpPr/>
-        <p:nvPr/>
-      </p:nvGrpSpPr>
-      <p:grpSpPr/>
-      <p:sp>
-        <p:nvSpPr>
-          <p:cNvPr id="2" name="TextBox 1"/>
-          <p:cNvSpPr txBox="1"/>
-          <p:nvPr/>
-        </p:nvSpPr>
-        <p:spPr>
-          <a:xfrm>
-            <a:off x="548640" y="365760"/>
-            <a:ext cx="11064240" cy="6126480"/>
-          </a:xfrm>
-          <a:prstGeom prst="rect">
-            <a:avLst/>
-          </a:prstGeom>
-          <a:noFill/>
-        </p:spPr>
-        <p:txBody>
-          <a:bodyPr wrap="square">
-            <a:spAutoFit/>
-          </a:bodyPr>
-          <a:lstStyle/>
-          <a:p/>
-          <a:p>
-            <a:pPr>
-              <a:defRPr sz="1800" b="1"/>
-            </a:pPr>
-            <a:r>
-              <a:t>#1  [演示] 超自然行动组摸金陪 同行款 1号 摸金陪玩装备</a:t>
-            </a:r>
-          </a:p>
-          <a:p>
-            <a:pPr>
-              <a:defRPr sz="1400"/>
-            </a:pPr>
-            <a:r>
-              <a:t>价格：14.9    销量/想要：100</a:t>
-            </a:r>
-          </a:p>
-          <a:p>
-            <a:pPr>
-              <a:defRPr sz="1400"/>
-            </a:pPr>
-            <a:r>
-              <a:t>店铺/卖家：演示店铺1    发货地：浙江杭州</a:t>
-            </a:r>
-          </a:p>
-          <a:p>
-            <a:pPr>
-              <a:defRPr sz="1400"/>
-            </a:pPr>
-            <a:r>
-              <a:t>SKU：详情页为演示地址或无详情链接</a:t>
-            </a:r>
-          </a:p>
-          <a:p>
-            <a:pPr>
-              <a:defRPr sz="1400"/>
-            </a:pPr>
-            <a:r>
-              <a:t>卖点：装备包撤离、首单免费</a:t>
-            </a:r>
-          </a:p>
-          <a:p>
-            <a:pPr>
-              <a:defRPr sz="1400"/>
-            </a:pPr>
-            <a:r>
-              <a:t>链接：https://example.invalid/demo/taobao/1</a:t>
-            </a:r>
-          </a:p>
-        </p:txBody>
-      </p:sp>
-    </p:spTree>
-  </p:cSld>
-  <p:clrMapOvr>
-    <a:masterClrMapping/>
-  </p:clrMapOvr>
-</p:sld>
-</file>
-
-<file path=ppt/slides/slide3.xml><?xml version="1.0" encoding="utf-8"?>
-<p:sld xmlns:a="http://schemas.openxmlformats.org/drawingml/2006/main" xmlns:p="http://schemas.openxmlformats.org/presentationml/2006/main" xmlns:r="http://schemas.openxmlformats.org/officeDocument/2006/relationships">
-  <p:cSld>
-    <p:spTree>
-      <p:nvGrpSpPr>
-        <p:cNvPr id="1" name=""/>
-        <p:cNvGrpSpPr/>
-        <p:nvPr/>
-      </p:nvGrpSpPr>
-      <p:grpSpPr/>
-      <p:sp>
-        <p:nvSpPr>
-          <p:cNvPr id="2" name="TextBox 1"/>
-          <p:cNvSpPr txBox="1"/>
-          <p:nvPr/>
-        </p:nvSpPr>
-        <p:spPr>
-          <a:xfrm>
-            <a:off x="548640" y="365760"/>
-            <a:ext cx="11064240" cy="6126480"/>
-          </a:xfrm>
-          <a:prstGeom prst="rect">
-            <a:avLst/>
-          </a:prstGeom>
-          <a:noFill/>
-        </p:spPr>
-        <p:txBody>
-          <a:bodyPr wrap="square">
-            <a:spAutoFit/>
-          </a:bodyPr>
-          <a:lstStyle/>
-          <a:p/>
-          <a:p>
-            <a:pPr>
-              <a:defRPr sz="1800" b="1"/>
-            </a:pPr>
-            <a:r>
-              <a:t>#2  [演示] 超自然行动组摸金陪 同行款 2号 摸金陪玩装备</a:t>
-            </a:r>
-          </a:p>
-          <a:p>
-            <a:pPr>
-              <a:defRPr sz="1400"/>
-            </a:pPr>
-            <a:r>
-              <a:t>价格：19.9    销量/想要：200</a:t>
-            </a:r>
-          </a:p>
-          <a:p>
-            <a:pPr>
-              <a:defRPr sz="1400"/>
-            </a:pPr>
-            <a:r>
-              <a:t>店铺/卖家：演示店铺2    发货地：浙江杭州</a:t>
-            </a:r>
-          </a:p>
-          <a:p>
-            <a:pPr>
-              <a:defRPr sz="1400"/>
-            </a:pPr>
-            <a:r>
-              <a:t>SKU：详情页为演示地址或无详情链接</a:t>
-            </a:r>
-          </a:p>
-          <a:p>
-            <a:pPr>
-              <a:defRPr sz="1400"/>
-            </a:pPr>
-            <a:r>
-              <a:t>卖点：装备包撤离、首单免费</a:t>
-            </a:r>
-          </a:p>
-          <a:p>
-            <a:pPr>
-              <a:defRPr sz="1400"/>
-            </a:pPr>
-            <a:r>
-              <a:t>链接：https://example.invalid/demo/taobao/2</a:t>
-            </a:r>
-          </a:p>
-        </p:txBody>
-      </p:sp>
-    </p:spTree>
-  </p:cSld>
-  <p:clrMapOvr>
-    <a:masterClrMapping/>
-  </p:clrMapOvr>
-</p:sld>
-</file>
-
-<file path=ppt/slides/slide4.xml><?xml version="1.0" encoding="utf-8"?>
-<p:sld xmlns:a="http://schemas.openxmlformats.org/drawingml/2006/main" xmlns:p="http://schemas.openxmlformats.org/presentationml/2006/main" xmlns:r="http://schemas.openxmlformats.org/officeDocument/2006/relationships">
-  <p:cSld>
-    <p:spTree>
-      <p:nvGrpSpPr>
-        <p:cNvPr id="1" name=""/>
-        <p:cNvGrpSpPr/>
-        <p:nvPr/>
-      </p:nvGrpSpPr>
-      <p:grpSpPr/>
-      <p:sp>
-        <p:nvSpPr>
-          <p:cNvPr id="2" name="TextBox 1"/>
-          <p:cNvSpPr txBox="1"/>
-          <p:nvPr/>
-        </p:nvSpPr>
-        <p:spPr>
-          <a:xfrm>
-            <a:off x="548640" y="365760"/>
-            <a:ext cx="11064240" cy="6126480"/>
-          </a:xfrm>
-          <a:prstGeom prst="rect">
-            <a:avLst/>
-          </a:prstGeom>
-          <a:noFill/>
-        </p:spPr>
-        <p:txBody>
-          <a:bodyPr wrap="square">
-            <a:spAutoFit/>
-          </a:bodyPr>
-          <a:lstStyle/>
-          <a:p/>
-          <a:p>
-            <a:pPr>
-              <a:defRPr sz="1800" b="1"/>
-            </a:pPr>
-            <a:r>
-              <a:t>#3  [演示] 超自然行动组摸金陪 同行款 3号 摸金陪玩装备</a:t>
-            </a:r>
-          </a:p>
-          <a:p>
-            <a:pPr>
-              <a:defRPr sz="1400"/>
-            </a:pPr>
-            <a:r>
-              <a:t>价格：24.9    销量/想要：300</a:t>
-            </a:r>
-          </a:p>
-          <a:p>
-            <a:pPr>
-              <a:defRPr sz="1400"/>
-            </a:pPr>
-            <a:r>
-              <a:t>店铺/卖家：演示店铺3    发货地：浙江杭州</a:t>
-            </a:r>
-          </a:p>
-          <a:p>
-            <a:pPr>
-              <a:defRPr sz="1400"/>
-            </a:pPr>
-            <a:r>
-              <a:t>SKU：详情页为演示地址或无详情链接</a:t>
-            </a:r>
-          </a:p>
-          <a:p>
-            <a:pPr>
-              <a:defRPr sz="1400"/>
-            </a:pPr>
-            <a:r>
-              <a:t>卖点：装备包撤离、首单免费</a:t>
-            </a:r>
-          </a:p>
-          <a:p>
-            <a:pPr>
-              <a:defRPr sz="1400"/>
-            </a:pPr>
-            <a:r>
-              <a:t>链接：https://example.invalid/demo/taobao/3</a:t>
-            </a:r>
-          </a:p>
-        </p:txBody>
-      </p:sp>
-    </p:spTree>
-  </p:cSld>
-  <p:clrMapOvr>
-    <a:masterClrMapping/>
-  </p:clrMapOvr>
-</p:sld>
-</file>
-
-<file path=ppt/slides/slide5.xml><?xml version="1.0" encoding="utf-8"?>
-<p:sld xmlns:a="http://schemas.openxmlformats.org/drawingml/2006/main" xmlns:p="http://schemas.openxmlformats.org/presentationml/2006/main" xmlns:r="http://schemas.openxmlformats.org/officeDocument/2006/relationships">
-  <p:cSld>
-    <p:spTree>
-      <p:nvGrpSpPr>
-        <p:cNvPr id="1" name=""/>
-        <p:cNvGrpSpPr/>
-        <p:nvPr/>
-      </p:nvGrpSpPr>
-      <p:grpSpPr/>
-      <p:sp>
-        <p:nvSpPr>
-          <p:cNvPr id="2" name="TextBox 1"/>
-          <p:cNvSpPr txBox="1"/>
-          <p:nvPr/>
-        </p:nvSpPr>
-        <p:spPr>
-          <a:xfrm>
-            <a:off x="548640" y="365760"/>
-            <a:ext cx="11064240" cy="6126480"/>
-          </a:xfrm>
-          <a:prstGeom prst="rect">
-            <a:avLst/>
-          </a:prstGeom>
-          <a:noFill/>
-        </p:spPr>
-        <p:txBody>
-          <a:bodyPr wrap="square">
-            <a:spAutoFit/>
-          </a:bodyPr>
-          <a:lstStyle/>
-          <a:p/>
-          <a:p>
-            <a:pPr>
-              <a:defRPr sz="1800" b="1"/>
-            </a:pPr>
-            <a:r>
-              <a:t>#4  [演示] 超自然行动组陪玩 同行款 1号 摸金陪玩装备</a:t>
-            </a:r>
-          </a:p>
-          <a:p>
-            <a:pPr>
-              <a:defRPr sz="1400"/>
-            </a:pPr>
-            <a:r>
-              <a:t>价格：14.9    销量/想要：100</a:t>
-            </a:r>
-          </a:p>
-          <a:p>
-            <a:pPr>
-              <a:defRPr sz="1400"/>
-            </a:pPr>
-            <a:r>
-              <a:t>店铺/卖家：演示店铺1    发货地：浙江杭州</a:t>
-            </a:r>
-          </a:p>
-          <a:p>
-            <a:pPr>
-              <a:defRPr sz="1400"/>
-            </a:pPr>
-            <a:r>
-              <a:t>SKU：详情页为演示地址或无详情链接</a:t>
-            </a:r>
-          </a:p>
-          <a:p>
-            <a:pPr>
-              <a:defRPr sz="1400"/>
-            </a:pPr>
-            <a:r>
-              <a:t>卖点：装备包撤离、首单免费</a:t>
-            </a:r>
-          </a:p>
-          <a:p>
-            <a:pPr>
-              <a:defRPr sz="1400"/>
-            </a:pPr>
-            <a:r>
-              <a:t>链接：https://example.invalid/demo/taobao/4</a:t>
-            </a:r>
-          </a:p>
-        </p:txBody>
-      </p:sp>
-    </p:spTree>
-  </p:cSld>
-  <p:clrMapOvr>
-    <a:masterClrMapping/>
-  </p:clrMapOvr>
-</p:sld>
-</file>
-
-<file path=ppt/slides/slide6.xml><?xml version="1.0" encoding="utf-8"?>
-<p:sld xmlns:a="http://schemas.openxmlformats.org/drawingml/2006/main" xmlns:p="http://schemas.openxmlformats.org/presentationml/2006/main" xmlns:r="http://schemas.openxmlformats.org/officeDocument/2006/relationships">
-  <p:cSld>
-    <p:spTree>
-      <p:nvGrpSpPr>
-        <p:cNvPr id="1" name=""/>
-        <p:cNvGrpSpPr/>
-        <p:nvPr/>
-      </p:nvGrpSpPr>
-      <p:grpSpPr/>
-      <p:sp>
-        <p:nvSpPr>
-          <p:cNvPr id="2" name="TextBox 1"/>
-          <p:cNvSpPr txBox="1"/>
-          <p:nvPr/>
-        </p:nvSpPr>
-        <p:spPr>
-          <a:xfrm>
-            <a:off x="548640" y="365760"/>
-            <a:ext cx="11064240" cy="6126480"/>
-          </a:xfrm>
-          <a:prstGeom prst="rect">
-            <a:avLst/>
-          </a:prstGeom>
-          <a:noFill/>
-        </p:spPr>
-        <p:txBody>
-          <a:bodyPr wrap="square">
-            <a:spAutoFit/>
-          </a:bodyPr>
-          <a:lstStyle/>
-          <a:p/>
-          <a:p>
-            <a:pPr>
-              <a:defRPr sz="1800" b="1"/>
-            </a:pPr>
-            <a:r>
-              <a:t>#5  [演示] 超自然行动组陪玩 同行款 2号 摸金陪玩装备</a:t>
-            </a:r>
-          </a:p>
-          <a:p>
-            <a:pPr>
-              <a:defRPr sz="1400"/>
-            </a:pPr>
-            <a:r>
-              <a:t>价格：19.9    销量/想要：200</a:t>
-            </a:r>
-          </a:p>
-          <a:p>
-            <a:pPr>
-              <a:defRPr sz="1400"/>
-            </a:pPr>
-            <a:r>
-              <a:t>店铺/卖家：演示店铺2    发货地：浙江杭州</a:t>
-            </a:r>
-          </a:p>
-          <a:p>
-            <a:pPr>
-              <a:defRPr sz="1400"/>
-            </a:pPr>
-            <a:r>
-              <a:t>SKU：详情页为演示地址或无详情链接</a:t>
-            </a:r>
-          </a:p>
-          <a:p>
-            <a:pPr>
-              <a:defRPr sz="1400"/>
-            </a:pPr>
-            <a:r>
-              <a:t>卖点：装备包撤离、首单免费</a:t>
-            </a:r>
-          </a:p>
-          <a:p>
-            <a:pPr>
-              <a:defRPr sz="1400"/>
-            </a:pPr>
-            <a:r>
-              <a:t>链接：https://example.invalid/demo/taobao/5</a:t>
-            </a:r>
-          </a:p>
-        </p:txBody>
-      </p:sp>
-    </p:spTree>
-  </p:cSld>
-  <p:clrMapOvr>
-    <a:masterClrMapping/>
-  </p:clrMapOvr>
-</p:sld>
-</file>
-
-<file path=ppt/slides/slide7.xml><?xml version="1.0" encoding="utf-8"?>
-<p:sld xmlns:a="http://schemas.openxmlformats.org/drawingml/2006/main" xmlns:p="http://schemas.openxmlformats.org/presentationml/2006/main" xmlns:r="http://schemas.openxmlformats.org/officeDocument/2006/relationships">
-  <p:cSld>
-    <p:spTree>
-      <p:nvGrpSpPr>
-        <p:cNvPr id="1" name=""/>
-        <p:cNvGrpSpPr/>
-        <p:nvPr/>
-      </p:nvGrpSpPr>
-      <p:grpSpPr/>
-      <p:sp>
-        <p:nvSpPr>
-          <p:cNvPr id="2" name="TextBox 1"/>
-          <p:cNvSpPr txBox="1"/>
-          <p:nvPr/>
-        </p:nvSpPr>
-        <p:spPr>
-          <a:xfrm>
-            <a:off x="548640" y="365760"/>
-            <a:ext cx="11064240" cy="6126480"/>
-          </a:xfrm>
-          <a:prstGeom prst="rect">
-            <a:avLst/>
-          </a:prstGeom>
-          <a:noFill/>
-        </p:spPr>
-        <p:txBody>
-          <a:bodyPr wrap="square">
-            <a:spAutoFit/>
-          </a:bodyPr>
-          <a:lstStyle/>
-          <a:p/>
-          <a:p>
-            <a:pPr>
-              <a:defRPr sz="1800" b="1"/>
-            </a:pPr>
-            <a:r>
-              <a:t>#6  [演示] 超自然行动组陪玩 同行款 3号 摸金陪玩装备</a:t>
-            </a:r>
-          </a:p>
-          <a:p>
-            <a:pPr>
-              <a:defRPr sz="1400"/>
-            </a:pPr>
-            <a:r>
-              <a:t>价格：24.9    销量/想要：300</a:t>
-            </a:r>
-          </a:p>
-          <a:p>
-            <a:pPr>
-              <a:defRPr sz="1400"/>
-            </a:pPr>
-            <a:r>
-              <a:t>店铺/卖家：演示店铺3    发货地：浙江杭州</a:t>
-            </a:r>
-          </a:p>
-          <a:p>
-            <a:pPr>
-              <a:defRPr sz="1400"/>
-            </a:pPr>
-            <a:r>
-              <a:t>SKU：详情页为演示地址或无详情链接</a:t>
-            </a:r>
-          </a:p>
-          <a:p>
-            <a:pPr>
-              <a:defRPr sz="1400"/>
-            </a:pPr>
-            <a:r>
-              <a:t>卖点：装备包撤离、首单免费</a:t>
-            </a:r>
-          </a:p>
-          <a:p>
-            <a:pPr>
-              <a:defRPr sz="1400"/>
-            </a:pPr>
-            <a:r>
-              <a:t>链接：https://example.invalid/demo/taobao/6</a:t>
-            </a:r>
-          </a:p>
-        </p:txBody>
-      </p:sp>
-    </p:spTree>
-  </p:cSld>
-  <p:clrMapOvr>
-    <a:masterClrMapping/>
-  </p:clrMapOvr>
-</p:sld>
-</file>
-
-<file path=ppt/slides/slide8.xml><?xml version="1.0" encoding="utf-8"?>
-<p:sld xmlns:a="http://schemas.openxmlformats.org/drawingml/2006/main" xmlns:p="http://schemas.openxmlformats.org/presentationml/2006/main" xmlns:r="http://schemas.openxmlformats.org/officeDocument/2006/relationships">
-  <p:cSld>
-    <p:spTree>
-      <p:nvGrpSpPr>
-        <p:cNvPr id="1" name=""/>
-        <p:cNvGrpSpPr/>
-        <p:nvPr/>
-      </p:nvGrpSpPr>
-      <p:grpSpPr/>
-      <p:sp>
-        <p:nvSpPr>
-          <p:cNvPr id="2" name="TextBox 1"/>
-          <p:cNvSpPr txBox="1"/>
-          <p:nvPr/>
-        </p:nvSpPr>
-        <p:spPr>
-          <a:xfrm>
-            <a:off x="548640" y="365760"/>
-            <a:ext cx="11064240" cy="6126480"/>
-          </a:xfrm>
-          <a:prstGeom prst="rect">
-            <a:avLst/>
-          </a:prstGeom>
-          <a:noFill/>
-        </p:spPr>
-        <p:txBody>
-          <a:bodyPr wrap="square">
-            <a:spAutoFit/>
-          </a:bodyPr>
-          <a:lstStyle/>
-          <a:p/>
-          <a:p>
-            <a:pPr>
-              <a:defRPr sz="1800" b="1"/>
-            </a:pPr>
-            <a:r>
-              <a:t>#7  [演示] 摸金陪玩 同行款 1号 摸金陪玩装备</a:t>
-            </a:r>
-          </a:p>
-          <a:p>
-            <a:pPr>
-              <a:defRPr sz="1400"/>
-            </a:pPr>
-            <a:r>
-              <a:t>价格：14.9    销量/想要：100</a:t>
-            </a:r>
-          </a:p>
-          <a:p>
-            <a:pPr>
-              <a:defRPr sz="1400"/>
-            </a:pPr>
-            <a:r>
-              <a:t>店铺/卖家：演示店铺1    发货地：浙江杭州</a:t>
-            </a:r>
-          </a:p>
-          <a:p>
-            <a:pPr>
-              <a:defRPr sz="1400"/>
-            </a:pPr>
-            <a:r>
-              <a:t>SKU：详情页为演示地址或无详情链接</a:t>
-            </a:r>
-          </a:p>
-          <a:p>
-            <a:pPr>
-              <a:defRPr sz="1400"/>
-            </a:pPr>
-            <a:r>
-              <a:t>卖点：装备包撤离、首单免费</a:t>
-            </a:r>
-          </a:p>
-          <a:p>
-            <a:pPr>
-              <a:defRPr sz="1400"/>
-            </a:pPr>
-            <a:r>
-              <a:t>链接：https://example.invalid/demo/taobao/7</a:t>
-            </a:r>
-          </a:p>
-        </p:txBody>
-      </p:sp>
-    </p:spTree>
-  </p:cSld>
-  <p:clrMapOvr>
-    <a:masterClrMapping/>
-  </p:clrMapOvr>
-</p:sld>
-</file>
-
-<file path=ppt/slides/slide9.xml><?xml version="1.0" encoding="utf-8"?>
-<p:sld xmlns:a="http://schemas.openxmlformats.org/drawingml/2006/main" xmlns:p="http://schemas.openxmlformats.org/presentationml/2006/main" xmlns:r="http://schemas.openxmlformats.org/officeDocument/2006/relationships">
-  <p:cSld>
-    <p:spTree>
-      <p:nvGrpSpPr>
-        <p:cNvPr id="1" name=""/>
-        <p:cNvGrpSpPr/>
-        <p:nvPr/>
-      </p:nvGrpSpPr>
-      <p:grpSpPr/>
-      <p:sp>
-        <p:nvSpPr>
-          <p:cNvPr id="2" name="TextBox 1"/>
-          <p:cNvSpPr txBox="1"/>
-          <p:nvPr/>
-        </p:nvSpPr>
-        <p:spPr>
-          <a:xfrm>
-            <a:off x="548640" y="365760"/>
-            <a:ext cx="11064240" cy="6126480"/>
-          </a:xfrm>
-          <a:prstGeom prst="rect">
-            <a:avLst/>
-          </a:prstGeom>
-          <a:noFill/>
-        </p:spPr>
-        <p:txBody>
-          <a:bodyPr wrap="square">
-            <a:spAutoFit/>
-          </a:bodyPr>
-          <a:lstStyle/>
-          <a:p/>
-          <a:p>
-            <a:pPr>
-              <a:defRPr sz="1800" b="1"/>
-            </a:pPr>
-            <a:r>
-              <a:t>#8  [演示] 摸金陪玩 同行款 2号 摸金陪玩装备</a:t>
-            </a:r>
-          </a:p>
-          <a:p>
-            <a:pPr>
-              <a:defRPr sz="1400"/>
-            </a:pPr>
-            <a:r>
-              <a:t>价格：19.9    销量/想要：200</a:t>
-            </a:r>
-          </a:p>
-          <a:p>
-            <a:pPr>
-              <a:defRPr sz="1400"/>
-            </a:pPr>
-            <a:r>
-              <a:t>店铺/卖家：演示店铺2    发货地：浙江杭州</a:t>
-            </a:r>
-          </a:p>
-          <a:p>
-            <a:pPr>
-              <a:defRPr sz="1400"/>
-            </a:pPr>
-            <a:r>
-              <a:t>SKU：详情页为演示地址或无详情链接</a:t>
-            </a:r>
-          </a:p>
-          <a:p>
-            <a:pPr>
-              <a:defRPr sz="1400"/>
-            </a:pPr>
-            <a:r>
-              <a:t>卖点：装备包撤离、首单免费</a:t>
-            </a:r>
-          </a:p>
-          <a:p>
-            <a:pPr>
-              <a:defRPr sz="1400"/>
-            </a:pPr>
-            <a:r>
-              <a:t>链接：https://example.invalid/demo/taobao/8</a:t>
+              <a:t>2026-09-30  ·  0 个商品</a:t>
             </a:r>
           </a:p>
         </p:txBody>

--- a/archive/2026-09-30/taobao/PPT报告/淘宝同行爆款分析-2026-09-30.pptx
+++ b/archive/2026-09-30/taobao/PPT报告/淘宝同行爆款分析-2026-09-30.pptx
@@ -6,6 +6,16 @@
   </p:sldMasterIdLst>
   <p:sldIdLst>
     <p:sldId id="256" r:id="rId7"/>
+    <p:sldId id="257" r:id="rId8"/>
+    <p:sldId id="258" r:id="rId9"/>
+    <p:sldId id="259" r:id="rId10"/>
+    <p:sldId id="260" r:id="rId11"/>
+    <p:sldId id="261" r:id="rId12"/>
+    <p:sldId id="262" r:id="rId13"/>
+    <p:sldId id="263" r:id="rId14"/>
+    <p:sldId id="264" r:id="rId15"/>
+    <p:sldId id="265" r:id="rId16"/>
+    <p:sldId id="266" r:id="rId17"/>
   </p:sldIdLst>
   <p:sldSz cx="12191695" cy="6858000" type="screen4x3"/>
   <p:notesSz cx="6858000" cy="9144000"/>
@@ -3123,7 +3133,943 @@
               <a:defRPr sz="1800"/>
             </a:pPr>
             <a:r>
-              <a:t>2026-09-30  ·  0 个商品</a:t>
+              <a:t>2026-09-30  ·  10 个商品</a:t>
+            </a:r>
+          </a:p>
+        </p:txBody>
+      </p:sp>
+      <p:sp>
+        <p:nvSpPr>
+          <p:cNvPr id="3" name="TextBox 2"/>
+          <p:cNvSpPr txBox="1"/>
+          <p:nvPr/>
+        </p:nvSpPr>
+        <p:spPr>
+          <a:xfrm>
+            <a:off x="731520" y="4206240"/>
+            <a:ext cx="10698480" cy="548640"/>
+          </a:xfrm>
+          <a:prstGeom prst="rect">
+            <a:avLst/>
+          </a:prstGeom>
+          <a:noFill/>
+        </p:spPr>
+        <p:txBody>
+          <a:bodyPr wrap="none">
+            <a:spAutoFit/>
+          </a:bodyPr>
+          <a:lstStyle/>
+          <a:p/>
+          <a:p>
+            <a:pPr>
+              <a:defRPr sz="1400">
+                <a:solidFill>
+                  <a:srgbClr val="C06040"/>
+                </a:solidFill>
+              </a:defRPr>
+            </a:pPr>
+            <a:r>
+              <a:t>* 本页为【演示数据】，仅用于验证链路</a:t>
+            </a:r>
+          </a:p>
+        </p:txBody>
+      </p:sp>
+    </p:spTree>
+  </p:cSld>
+  <p:clrMapOvr>
+    <a:masterClrMapping/>
+  </p:clrMapOvr>
+</p:sld>
+</file>
+
+<file path=ppt/slides/slide10.xml><?xml version="1.0" encoding="utf-8"?>
+<p:sld xmlns:a="http://schemas.openxmlformats.org/drawingml/2006/main" xmlns:p="http://schemas.openxmlformats.org/presentationml/2006/main" xmlns:r="http://schemas.openxmlformats.org/officeDocument/2006/relationships">
+  <p:cSld>
+    <p:spTree>
+      <p:nvGrpSpPr>
+        <p:cNvPr id="1" name=""/>
+        <p:cNvGrpSpPr/>
+        <p:nvPr/>
+      </p:nvGrpSpPr>
+      <p:grpSpPr/>
+      <p:sp>
+        <p:nvSpPr>
+          <p:cNvPr id="2" name="TextBox 1"/>
+          <p:cNvSpPr txBox="1"/>
+          <p:nvPr/>
+        </p:nvSpPr>
+        <p:spPr>
+          <a:xfrm>
+            <a:off x="548640" y="365760"/>
+            <a:ext cx="11064240" cy="6126480"/>
+          </a:xfrm>
+          <a:prstGeom prst="rect">
+            <a:avLst/>
+          </a:prstGeom>
+          <a:noFill/>
+        </p:spPr>
+        <p:txBody>
+          <a:bodyPr wrap="square">
+            <a:spAutoFit/>
+          </a:bodyPr>
+          <a:lstStyle/>
+          <a:p/>
+          <a:p>
+            <a:pPr>
+              <a:defRPr sz="1800" b="1"/>
+            </a:pPr>
+            <a:r>
+              <a:t>#9  [演示] 摸金陪玩 同行款 3号 摸金陪玩装备</a:t>
+            </a:r>
+          </a:p>
+          <a:p>
+            <a:pPr>
+              <a:defRPr sz="1400"/>
+            </a:pPr>
+            <a:r>
+              <a:t>价格：24.9    销量/想要：300</a:t>
+            </a:r>
+          </a:p>
+          <a:p>
+            <a:pPr>
+              <a:defRPr sz="1400"/>
+            </a:pPr>
+            <a:r>
+              <a:t>店铺/卖家：演示店铺3    发货地：浙江杭州</a:t>
+            </a:r>
+          </a:p>
+          <a:p>
+            <a:pPr>
+              <a:defRPr sz="1400"/>
+            </a:pPr>
+            <a:r>
+              <a:t>SKU：详情页为演示地址或无详情链接</a:t>
+            </a:r>
+          </a:p>
+          <a:p>
+            <a:pPr>
+              <a:defRPr sz="1400"/>
+            </a:pPr>
+            <a:r>
+              <a:t>卖点：装备包撤离、首单免费</a:t>
+            </a:r>
+          </a:p>
+          <a:p>
+            <a:pPr>
+              <a:defRPr sz="1400"/>
+            </a:pPr>
+            <a:r>
+              <a:t>链接：https://example.invalid/demo/taobao/9</a:t>
+            </a:r>
+          </a:p>
+        </p:txBody>
+      </p:sp>
+    </p:spTree>
+  </p:cSld>
+  <p:clrMapOvr>
+    <a:masterClrMapping/>
+  </p:clrMapOvr>
+</p:sld>
+</file>
+
+<file path=ppt/slides/slide11.xml><?xml version="1.0" encoding="utf-8"?>
+<p:sld xmlns:a="http://schemas.openxmlformats.org/drawingml/2006/main" xmlns:p="http://schemas.openxmlformats.org/presentationml/2006/main" xmlns:r="http://schemas.openxmlformats.org/officeDocument/2006/relationships">
+  <p:cSld>
+    <p:spTree>
+      <p:nvGrpSpPr>
+        <p:cNvPr id="1" name=""/>
+        <p:cNvGrpSpPr/>
+        <p:nvPr/>
+      </p:nvGrpSpPr>
+      <p:grpSpPr/>
+      <p:sp>
+        <p:nvSpPr>
+          <p:cNvPr id="2" name="TextBox 1"/>
+          <p:cNvSpPr txBox="1"/>
+          <p:nvPr/>
+        </p:nvSpPr>
+        <p:spPr>
+          <a:xfrm>
+            <a:off x="548640" y="365760"/>
+            <a:ext cx="11064240" cy="6126480"/>
+          </a:xfrm>
+          <a:prstGeom prst="rect">
+            <a:avLst/>
+          </a:prstGeom>
+          <a:noFill/>
+        </p:spPr>
+        <p:txBody>
+          <a:bodyPr wrap="square">
+            <a:spAutoFit/>
+          </a:bodyPr>
+          <a:lstStyle/>
+          <a:p/>
+          <a:p>
+            <a:pPr>
+              <a:defRPr sz="1800" b="1"/>
+            </a:pPr>
+            <a:r>
+              <a:t>#10  [演示] 超自然行动组 同行款 1号 摸金陪玩装备</a:t>
+            </a:r>
+          </a:p>
+          <a:p>
+            <a:pPr>
+              <a:defRPr sz="1400"/>
+            </a:pPr>
+            <a:r>
+              <a:t>价格：14.9    销量/想要：100</a:t>
+            </a:r>
+          </a:p>
+          <a:p>
+            <a:pPr>
+              <a:defRPr sz="1400"/>
+            </a:pPr>
+            <a:r>
+              <a:t>店铺/卖家：演示店铺1    发货地：浙江杭州</a:t>
+            </a:r>
+          </a:p>
+          <a:p>
+            <a:pPr>
+              <a:defRPr sz="1400"/>
+            </a:pPr>
+            <a:r>
+              <a:t>SKU：详情页为演示地址或无详情链接</a:t>
+            </a:r>
+          </a:p>
+          <a:p>
+            <a:pPr>
+              <a:defRPr sz="1400"/>
+            </a:pPr>
+            <a:r>
+              <a:t>卖点：装备包撤离、首单免费</a:t>
+            </a:r>
+          </a:p>
+          <a:p>
+            <a:pPr>
+              <a:defRPr sz="1400"/>
+            </a:pPr>
+            <a:r>
+              <a:t>链接：https://example.invalid/demo/taobao/10</a:t>
+            </a:r>
+          </a:p>
+        </p:txBody>
+      </p:sp>
+    </p:spTree>
+  </p:cSld>
+  <p:clrMapOvr>
+    <a:masterClrMapping/>
+  </p:clrMapOvr>
+</p:sld>
+</file>
+
+<file path=ppt/slides/slide2.xml><?xml version="1.0" encoding="utf-8"?>
+<p:sld xmlns:a="http://schemas.openxmlformats.org/drawingml/2006/main" xmlns:p="http://schemas.openxmlformats.org/presentationml/2006/main" xmlns:r="http://schemas.openxmlformats.org/officeDocument/2006/relationships">
+  <p:cSld>
+    <p:spTree>
+      <p:nvGrpSpPr>
+        <p:cNvPr id="1" name=""/>
+        <p:cNvGrpSpPr/>
+        <p:nvPr/>
+      </p:nvGrpSpPr>
+      <p:grpSpPr/>
+      <p:sp>
+        <p:nvSpPr>
+          <p:cNvPr id="2" name="TextBox 1"/>
+          <p:cNvSpPr txBox="1"/>
+          <p:nvPr/>
+        </p:nvSpPr>
+        <p:spPr>
+          <a:xfrm>
+            <a:off x="548640" y="365760"/>
+            <a:ext cx="11064240" cy="6126480"/>
+          </a:xfrm>
+          <a:prstGeom prst="rect">
+            <a:avLst/>
+          </a:prstGeom>
+          <a:noFill/>
+        </p:spPr>
+        <p:txBody>
+          <a:bodyPr wrap="square">
+            <a:spAutoFit/>
+          </a:bodyPr>
+          <a:lstStyle/>
+          <a:p/>
+          <a:p>
+            <a:pPr>
+              <a:defRPr sz="1800" b="1"/>
+            </a:pPr>
+            <a:r>
+              <a:t>#1  [演示] 超自然行动组摸金陪 同行款 1号 摸金陪玩装备</a:t>
+            </a:r>
+          </a:p>
+          <a:p>
+            <a:pPr>
+              <a:defRPr sz="1400"/>
+            </a:pPr>
+            <a:r>
+              <a:t>价格：14.9    销量/想要：100</a:t>
+            </a:r>
+          </a:p>
+          <a:p>
+            <a:pPr>
+              <a:defRPr sz="1400"/>
+            </a:pPr>
+            <a:r>
+              <a:t>店铺/卖家：演示店铺1    发货地：浙江杭州</a:t>
+            </a:r>
+          </a:p>
+          <a:p>
+            <a:pPr>
+              <a:defRPr sz="1400"/>
+            </a:pPr>
+            <a:r>
+              <a:t>SKU：详情页为演示地址或无详情链接</a:t>
+            </a:r>
+          </a:p>
+          <a:p>
+            <a:pPr>
+              <a:defRPr sz="1400"/>
+            </a:pPr>
+            <a:r>
+              <a:t>卖点：装备包撤离、首单免费</a:t>
+            </a:r>
+          </a:p>
+          <a:p>
+            <a:pPr>
+              <a:defRPr sz="1400"/>
+            </a:pPr>
+            <a:r>
+              <a:t>链接：https://example.invalid/demo/taobao/1</a:t>
+            </a:r>
+          </a:p>
+        </p:txBody>
+      </p:sp>
+    </p:spTree>
+  </p:cSld>
+  <p:clrMapOvr>
+    <a:masterClrMapping/>
+  </p:clrMapOvr>
+</p:sld>
+</file>
+
+<file path=ppt/slides/slide3.xml><?xml version="1.0" encoding="utf-8"?>
+<p:sld xmlns:a="http://schemas.openxmlformats.org/drawingml/2006/main" xmlns:p="http://schemas.openxmlformats.org/presentationml/2006/main" xmlns:r="http://schemas.openxmlformats.org/officeDocument/2006/relationships">
+  <p:cSld>
+    <p:spTree>
+      <p:nvGrpSpPr>
+        <p:cNvPr id="1" name=""/>
+        <p:cNvGrpSpPr/>
+        <p:nvPr/>
+      </p:nvGrpSpPr>
+      <p:grpSpPr/>
+      <p:sp>
+        <p:nvSpPr>
+          <p:cNvPr id="2" name="TextBox 1"/>
+          <p:cNvSpPr txBox="1"/>
+          <p:nvPr/>
+        </p:nvSpPr>
+        <p:spPr>
+          <a:xfrm>
+            <a:off x="548640" y="365760"/>
+            <a:ext cx="11064240" cy="6126480"/>
+          </a:xfrm>
+          <a:prstGeom prst="rect">
+            <a:avLst/>
+          </a:prstGeom>
+          <a:noFill/>
+        </p:spPr>
+        <p:txBody>
+          <a:bodyPr wrap="square">
+            <a:spAutoFit/>
+          </a:bodyPr>
+          <a:lstStyle/>
+          <a:p/>
+          <a:p>
+            <a:pPr>
+              <a:defRPr sz="1800" b="1"/>
+            </a:pPr>
+            <a:r>
+              <a:t>#2  [演示] 超自然行动组摸金陪 同行款 2号 摸金陪玩装备</a:t>
+            </a:r>
+          </a:p>
+          <a:p>
+            <a:pPr>
+              <a:defRPr sz="1400"/>
+            </a:pPr>
+            <a:r>
+              <a:t>价格：19.9    销量/想要：200</a:t>
+            </a:r>
+          </a:p>
+          <a:p>
+            <a:pPr>
+              <a:defRPr sz="1400"/>
+            </a:pPr>
+            <a:r>
+              <a:t>店铺/卖家：演示店铺2    发货地：浙江杭州</a:t>
+            </a:r>
+          </a:p>
+          <a:p>
+            <a:pPr>
+              <a:defRPr sz="1400"/>
+            </a:pPr>
+            <a:r>
+              <a:t>SKU：详情页为演示地址或无详情链接</a:t>
+            </a:r>
+          </a:p>
+          <a:p>
+            <a:pPr>
+              <a:defRPr sz="1400"/>
+            </a:pPr>
+            <a:r>
+              <a:t>卖点：装备包撤离、首单免费</a:t>
+            </a:r>
+          </a:p>
+          <a:p>
+            <a:pPr>
+              <a:defRPr sz="1400"/>
+            </a:pPr>
+            <a:r>
+              <a:t>链接：https://example.invalid/demo/taobao/2</a:t>
+            </a:r>
+          </a:p>
+        </p:txBody>
+      </p:sp>
+    </p:spTree>
+  </p:cSld>
+  <p:clrMapOvr>
+    <a:masterClrMapping/>
+  </p:clrMapOvr>
+</p:sld>
+</file>
+
+<file path=ppt/slides/slide4.xml><?xml version="1.0" encoding="utf-8"?>
+<p:sld xmlns:a="http://schemas.openxmlformats.org/drawingml/2006/main" xmlns:p="http://schemas.openxmlformats.org/presentationml/2006/main" xmlns:r="http://schemas.openxmlformats.org/officeDocument/2006/relationships">
+  <p:cSld>
+    <p:spTree>
+      <p:nvGrpSpPr>
+        <p:cNvPr id="1" name=""/>
+        <p:cNvGrpSpPr/>
+        <p:nvPr/>
+      </p:nvGrpSpPr>
+      <p:grpSpPr/>
+      <p:sp>
+        <p:nvSpPr>
+          <p:cNvPr id="2" name="TextBox 1"/>
+          <p:cNvSpPr txBox="1"/>
+          <p:nvPr/>
+        </p:nvSpPr>
+        <p:spPr>
+          <a:xfrm>
+            <a:off x="548640" y="365760"/>
+            <a:ext cx="11064240" cy="6126480"/>
+          </a:xfrm>
+          <a:prstGeom prst="rect">
+            <a:avLst/>
+          </a:prstGeom>
+          <a:noFill/>
+        </p:spPr>
+        <p:txBody>
+          <a:bodyPr wrap="square">
+            <a:spAutoFit/>
+          </a:bodyPr>
+          <a:lstStyle/>
+          <a:p/>
+          <a:p>
+            <a:pPr>
+              <a:defRPr sz="1800" b="1"/>
+            </a:pPr>
+            <a:r>
+              <a:t>#3  [演示] 超自然行动组摸金陪 同行款 3号 摸金陪玩装备</a:t>
+            </a:r>
+          </a:p>
+          <a:p>
+            <a:pPr>
+              <a:defRPr sz="1400"/>
+            </a:pPr>
+            <a:r>
+              <a:t>价格：24.9    销量/想要：300</a:t>
+            </a:r>
+          </a:p>
+          <a:p>
+            <a:pPr>
+              <a:defRPr sz="1400"/>
+            </a:pPr>
+            <a:r>
+              <a:t>店铺/卖家：演示店铺3    发货地：浙江杭州</a:t>
+            </a:r>
+          </a:p>
+          <a:p>
+            <a:pPr>
+              <a:defRPr sz="1400"/>
+            </a:pPr>
+            <a:r>
+              <a:t>SKU：详情页为演示地址或无详情链接</a:t>
+            </a:r>
+          </a:p>
+          <a:p>
+            <a:pPr>
+              <a:defRPr sz="1400"/>
+            </a:pPr>
+            <a:r>
+              <a:t>卖点：装备包撤离、首单免费</a:t>
+            </a:r>
+          </a:p>
+          <a:p>
+            <a:pPr>
+              <a:defRPr sz="1400"/>
+            </a:pPr>
+            <a:r>
+              <a:t>链接：https://example.invalid/demo/taobao/3</a:t>
+            </a:r>
+          </a:p>
+        </p:txBody>
+      </p:sp>
+    </p:spTree>
+  </p:cSld>
+  <p:clrMapOvr>
+    <a:masterClrMapping/>
+  </p:clrMapOvr>
+</p:sld>
+</file>
+
+<file path=ppt/slides/slide5.xml><?xml version="1.0" encoding="utf-8"?>
+<p:sld xmlns:a="http://schemas.openxmlformats.org/drawingml/2006/main" xmlns:p="http://schemas.openxmlformats.org/presentationml/2006/main" xmlns:r="http://schemas.openxmlformats.org/officeDocument/2006/relationships">
+  <p:cSld>
+    <p:spTree>
+      <p:nvGrpSpPr>
+        <p:cNvPr id="1" name=""/>
+        <p:cNvGrpSpPr/>
+        <p:nvPr/>
+      </p:nvGrpSpPr>
+      <p:grpSpPr/>
+      <p:sp>
+        <p:nvSpPr>
+          <p:cNvPr id="2" name="TextBox 1"/>
+          <p:cNvSpPr txBox="1"/>
+          <p:nvPr/>
+        </p:nvSpPr>
+        <p:spPr>
+          <a:xfrm>
+            <a:off x="548640" y="365760"/>
+            <a:ext cx="11064240" cy="6126480"/>
+          </a:xfrm>
+          <a:prstGeom prst="rect">
+            <a:avLst/>
+          </a:prstGeom>
+          <a:noFill/>
+        </p:spPr>
+        <p:txBody>
+          <a:bodyPr wrap="square">
+            <a:spAutoFit/>
+          </a:bodyPr>
+          <a:lstStyle/>
+          <a:p/>
+          <a:p>
+            <a:pPr>
+              <a:defRPr sz="1800" b="1"/>
+            </a:pPr>
+            <a:r>
+              <a:t>#4  [演示] 超自然行动组陪玩 同行款 1号 摸金陪玩装备</a:t>
+            </a:r>
+          </a:p>
+          <a:p>
+            <a:pPr>
+              <a:defRPr sz="1400"/>
+            </a:pPr>
+            <a:r>
+              <a:t>价格：14.9    销量/想要：100</a:t>
+            </a:r>
+          </a:p>
+          <a:p>
+            <a:pPr>
+              <a:defRPr sz="1400"/>
+            </a:pPr>
+            <a:r>
+              <a:t>店铺/卖家：演示店铺1    发货地：浙江杭州</a:t>
+            </a:r>
+          </a:p>
+          <a:p>
+            <a:pPr>
+              <a:defRPr sz="1400"/>
+            </a:pPr>
+            <a:r>
+              <a:t>SKU：详情页为演示地址或无详情链接</a:t>
+            </a:r>
+          </a:p>
+          <a:p>
+            <a:pPr>
+              <a:defRPr sz="1400"/>
+            </a:pPr>
+            <a:r>
+              <a:t>卖点：装备包撤离、首单免费</a:t>
+            </a:r>
+          </a:p>
+          <a:p>
+            <a:pPr>
+              <a:defRPr sz="1400"/>
+            </a:pPr>
+            <a:r>
+              <a:t>链接：https://example.invalid/demo/taobao/4</a:t>
+            </a:r>
+          </a:p>
+        </p:txBody>
+      </p:sp>
+    </p:spTree>
+  </p:cSld>
+  <p:clrMapOvr>
+    <a:masterClrMapping/>
+  </p:clrMapOvr>
+</p:sld>
+</file>
+
+<file path=ppt/slides/slide6.xml><?xml version="1.0" encoding="utf-8"?>
+<p:sld xmlns:a="http://schemas.openxmlformats.org/drawingml/2006/main" xmlns:p="http://schemas.openxmlformats.org/presentationml/2006/main" xmlns:r="http://schemas.openxmlformats.org/officeDocument/2006/relationships">
+  <p:cSld>
+    <p:spTree>
+      <p:nvGrpSpPr>
+        <p:cNvPr id="1" name=""/>
+        <p:cNvGrpSpPr/>
+        <p:nvPr/>
+      </p:nvGrpSpPr>
+      <p:grpSpPr/>
+      <p:sp>
+        <p:nvSpPr>
+          <p:cNvPr id="2" name="TextBox 1"/>
+          <p:cNvSpPr txBox="1"/>
+          <p:nvPr/>
+        </p:nvSpPr>
+        <p:spPr>
+          <a:xfrm>
+            <a:off x="548640" y="365760"/>
+            <a:ext cx="11064240" cy="6126480"/>
+          </a:xfrm>
+          <a:prstGeom prst="rect">
+            <a:avLst/>
+          </a:prstGeom>
+          <a:noFill/>
+        </p:spPr>
+        <p:txBody>
+          <a:bodyPr wrap="square">
+            <a:spAutoFit/>
+          </a:bodyPr>
+          <a:lstStyle/>
+          <a:p/>
+          <a:p>
+            <a:pPr>
+              <a:defRPr sz="1800" b="1"/>
+            </a:pPr>
+            <a:r>
+              <a:t>#5  [演示] 超自然行动组陪玩 同行款 2号 摸金陪玩装备</a:t>
+            </a:r>
+          </a:p>
+          <a:p>
+            <a:pPr>
+              <a:defRPr sz="1400"/>
+            </a:pPr>
+            <a:r>
+              <a:t>价格：19.9    销量/想要：200</a:t>
+            </a:r>
+          </a:p>
+          <a:p>
+            <a:pPr>
+              <a:defRPr sz="1400"/>
+            </a:pPr>
+            <a:r>
+              <a:t>店铺/卖家：演示店铺2    发货地：浙江杭州</a:t>
+            </a:r>
+          </a:p>
+          <a:p>
+            <a:pPr>
+              <a:defRPr sz="1400"/>
+            </a:pPr>
+            <a:r>
+              <a:t>SKU：详情页为演示地址或无详情链接</a:t>
+            </a:r>
+          </a:p>
+          <a:p>
+            <a:pPr>
+              <a:defRPr sz="1400"/>
+            </a:pPr>
+            <a:r>
+              <a:t>卖点：装备包撤离、首单免费</a:t>
+            </a:r>
+          </a:p>
+          <a:p>
+            <a:pPr>
+              <a:defRPr sz="1400"/>
+            </a:pPr>
+            <a:r>
+              <a:t>链接：https://example.invalid/demo/taobao/5</a:t>
+            </a:r>
+          </a:p>
+        </p:txBody>
+      </p:sp>
+    </p:spTree>
+  </p:cSld>
+  <p:clrMapOvr>
+    <a:masterClrMapping/>
+  </p:clrMapOvr>
+</p:sld>
+</file>
+
+<file path=ppt/slides/slide7.xml><?xml version="1.0" encoding="utf-8"?>
+<p:sld xmlns:a="http://schemas.openxmlformats.org/drawingml/2006/main" xmlns:p="http://schemas.openxmlformats.org/presentationml/2006/main" xmlns:r="http://schemas.openxmlformats.org/officeDocument/2006/relationships">
+  <p:cSld>
+    <p:spTree>
+      <p:nvGrpSpPr>
+        <p:cNvPr id="1" name=""/>
+        <p:cNvGrpSpPr/>
+        <p:nvPr/>
+      </p:nvGrpSpPr>
+      <p:grpSpPr/>
+      <p:sp>
+        <p:nvSpPr>
+          <p:cNvPr id="2" name="TextBox 1"/>
+          <p:cNvSpPr txBox="1"/>
+          <p:nvPr/>
+        </p:nvSpPr>
+        <p:spPr>
+          <a:xfrm>
+            <a:off x="548640" y="365760"/>
+            <a:ext cx="11064240" cy="6126480"/>
+          </a:xfrm>
+          <a:prstGeom prst="rect">
+            <a:avLst/>
+          </a:prstGeom>
+          <a:noFill/>
+        </p:spPr>
+        <p:txBody>
+          <a:bodyPr wrap="square">
+            <a:spAutoFit/>
+          </a:bodyPr>
+          <a:lstStyle/>
+          <a:p/>
+          <a:p>
+            <a:pPr>
+              <a:defRPr sz="1800" b="1"/>
+            </a:pPr>
+            <a:r>
+              <a:t>#6  [演示] 超自然行动组陪玩 同行款 3号 摸金陪玩装备</a:t>
+            </a:r>
+          </a:p>
+          <a:p>
+            <a:pPr>
+              <a:defRPr sz="1400"/>
+            </a:pPr>
+            <a:r>
+              <a:t>价格：24.9    销量/想要：300</a:t>
+            </a:r>
+          </a:p>
+          <a:p>
+            <a:pPr>
+              <a:defRPr sz="1400"/>
+            </a:pPr>
+            <a:r>
+              <a:t>店铺/卖家：演示店铺3    发货地：浙江杭州</a:t>
+            </a:r>
+          </a:p>
+          <a:p>
+            <a:pPr>
+              <a:defRPr sz="1400"/>
+            </a:pPr>
+            <a:r>
+              <a:t>SKU：详情页为演示地址或无详情链接</a:t>
+            </a:r>
+          </a:p>
+          <a:p>
+            <a:pPr>
+              <a:defRPr sz="1400"/>
+            </a:pPr>
+            <a:r>
+              <a:t>卖点：装备包撤离、首单免费</a:t>
+            </a:r>
+          </a:p>
+          <a:p>
+            <a:pPr>
+              <a:defRPr sz="1400"/>
+            </a:pPr>
+            <a:r>
+              <a:t>链接：https://example.invalid/demo/taobao/6</a:t>
+            </a:r>
+          </a:p>
+        </p:txBody>
+      </p:sp>
+    </p:spTree>
+  </p:cSld>
+  <p:clrMapOvr>
+    <a:masterClrMapping/>
+  </p:clrMapOvr>
+</p:sld>
+</file>
+
+<file path=ppt/slides/slide8.xml><?xml version="1.0" encoding="utf-8"?>
+<p:sld xmlns:a="http://schemas.openxmlformats.org/drawingml/2006/main" xmlns:p="http://schemas.openxmlformats.org/presentationml/2006/main" xmlns:r="http://schemas.openxmlformats.org/officeDocument/2006/relationships">
+  <p:cSld>
+    <p:spTree>
+      <p:nvGrpSpPr>
+        <p:cNvPr id="1" name=""/>
+        <p:cNvGrpSpPr/>
+        <p:nvPr/>
+      </p:nvGrpSpPr>
+      <p:grpSpPr/>
+      <p:sp>
+        <p:nvSpPr>
+          <p:cNvPr id="2" name="TextBox 1"/>
+          <p:cNvSpPr txBox="1"/>
+          <p:nvPr/>
+        </p:nvSpPr>
+        <p:spPr>
+          <a:xfrm>
+            <a:off x="548640" y="365760"/>
+            <a:ext cx="11064240" cy="6126480"/>
+          </a:xfrm>
+          <a:prstGeom prst="rect">
+            <a:avLst/>
+          </a:prstGeom>
+          <a:noFill/>
+        </p:spPr>
+        <p:txBody>
+          <a:bodyPr wrap="square">
+            <a:spAutoFit/>
+          </a:bodyPr>
+          <a:lstStyle/>
+          <a:p/>
+          <a:p>
+            <a:pPr>
+              <a:defRPr sz="1800" b="1"/>
+            </a:pPr>
+            <a:r>
+              <a:t>#7  [演示] 摸金陪玩 同行款 1号 摸金陪玩装备</a:t>
+            </a:r>
+          </a:p>
+          <a:p>
+            <a:pPr>
+              <a:defRPr sz="1400"/>
+            </a:pPr>
+            <a:r>
+              <a:t>价格：14.9    销量/想要：100</a:t>
+            </a:r>
+          </a:p>
+          <a:p>
+            <a:pPr>
+              <a:defRPr sz="1400"/>
+            </a:pPr>
+            <a:r>
+              <a:t>店铺/卖家：演示店铺1    发货地：浙江杭州</a:t>
+            </a:r>
+          </a:p>
+          <a:p>
+            <a:pPr>
+              <a:defRPr sz="1400"/>
+            </a:pPr>
+            <a:r>
+              <a:t>SKU：详情页为演示地址或无详情链接</a:t>
+            </a:r>
+          </a:p>
+          <a:p>
+            <a:pPr>
+              <a:defRPr sz="1400"/>
+            </a:pPr>
+            <a:r>
+              <a:t>卖点：装备包撤离、首单免费</a:t>
+            </a:r>
+          </a:p>
+          <a:p>
+            <a:pPr>
+              <a:defRPr sz="1400"/>
+            </a:pPr>
+            <a:r>
+              <a:t>链接：https://example.invalid/demo/taobao/7</a:t>
+            </a:r>
+          </a:p>
+        </p:txBody>
+      </p:sp>
+    </p:spTree>
+  </p:cSld>
+  <p:clrMapOvr>
+    <a:masterClrMapping/>
+  </p:clrMapOvr>
+</p:sld>
+</file>
+
+<file path=ppt/slides/slide9.xml><?xml version="1.0" encoding="utf-8"?>
+<p:sld xmlns:a="http://schemas.openxmlformats.org/drawingml/2006/main" xmlns:p="http://schemas.openxmlformats.org/presentationml/2006/main" xmlns:r="http://schemas.openxmlformats.org/officeDocument/2006/relationships">
+  <p:cSld>
+    <p:spTree>
+      <p:nvGrpSpPr>
+        <p:cNvPr id="1" name=""/>
+        <p:cNvGrpSpPr/>
+        <p:nvPr/>
+      </p:nvGrpSpPr>
+      <p:grpSpPr/>
+      <p:sp>
+        <p:nvSpPr>
+          <p:cNvPr id="2" name="TextBox 1"/>
+          <p:cNvSpPr txBox="1"/>
+          <p:nvPr/>
+        </p:nvSpPr>
+        <p:spPr>
+          <a:xfrm>
+            <a:off x="548640" y="365760"/>
+            <a:ext cx="11064240" cy="6126480"/>
+          </a:xfrm>
+          <a:prstGeom prst="rect">
+            <a:avLst/>
+          </a:prstGeom>
+          <a:noFill/>
+        </p:spPr>
+        <p:txBody>
+          <a:bodyPr wrap="square">
+            <a:spAutoFit/>
+          </a:bodyPr>
+          <a:lstStyle/>
+          <a:p/>
+          <a:p>
+            <a:pPr>
+              <a:defRPr sz="1800" b="1"/>
+            </a:pPr>
+            <a:r>
+              <a:t>#8  [演示] 摸金陪玩 同行款 2号 摸金陪玩装备</a:t>
+            </a:r>
+          </a:p>
+          <a:p>
+            <a:pPr>
+              <a:defRPr sz="1400"/>
+            </a:pPr>
+            <a:r>
+              <a:t>价格：19.9    销量/想要：200</a:t>
+            </a:r>
+          </a:p>
+          <a:p>
+            <a:pPr>
+              <a:defRPr sz="1400"/>
+            </a:pPr>
+            <a:r>
+              <a:t>店铺/卖家：演示店铺2    发货地：浙江杭州</a:t>
+            </a:r>
+          </a:p>
+          <a:p>
+            <a:pPr>
+              <a:defRPr sz="1400"/>
+            </a:pPr>
+            <a:r>
+              <a:t>SKU：详情页为演示地址或无详情链接</a:t>
+            </a:r>
+          </a:p>
+          <a:p>
+            <a:pPr>
+              <a:defRPr sz="1400"/>
+            </a:pPr>
+            <a:r>
+              <a:t>卖点：装备包撤离、首单免费</a:t>
+            </a:r>
+          </a:p>
+          <a:p>
+            <a:pPr>
+              <a:defRPr sz="1400"/>
+            </a:pPr>
+            <a:r>
+              <a:t>链接：https://example.invalid/demo/taobao/8</a:t>
             </a:r>
           </a:p>
         </p:txBody>

--- a/archive/2026-09-30/taobao/PPT报告/淘宝同行爆款分析-2026-09-30.pptx
+++ b/archive/2026-09-30/taobao/PPT报告/淘宝同行爆款分析-2026-09-30.pptx
@@ -16,6 +16,11 @@
     <p:sldId id="264" r:id="rId15"/>
     <p:sldId id="265" r:id="rId16"/>
     <p:sldId id="266" r:id="rId17"/>
+    <p:sldId id="267" r:id="rId18"/>
+    <p:sldId id="268" r:id="rId19"/>
+    <p:sldId id="269" r:id="rId20"/>
+    <p:sldId id="270" r:id="rId21"/>
+    <p:sldId id="271" r:id="rId22"/>
   </p:sldIdLst>
   <p:sldSz cx="12191695" cy="6858000" type="screen4x3"/>
   <p:notesSz cx="6858000" cy="9144000"/>
@@ -3133,43 +3138,7 @@
               <a:defRPr sz="1800"/>
             </a:pPr>
             <a:r>
-              <a:t>2026-09-30  ·  10 个商品</a:t>
-            </a:r>
-          </a:p>
-        </p:txBody>
-      </p:sp>
-      <p:sp>
-        <p:nvSpPr>
-          <p:cNvPr id="3" name="TextBox 2"/>
-          <p:cNvSpPr txBox="1"/>
-          <p:nvPr/>
-        </p:nvSpPr>
-        <p:spPr>
-          <a:xfrm>
-            <a:off x="731520" y="4206240"/>
-            <a:ext cx="10698480" cy="548640"/>
-          </a:xfrm>
-          <a:prstGeom prst="rect">
-            <a:avLst/>
-          </a:prstGeom>
-          <a:noFill/>
-        </p:spPr>
-        <p:txBody>
-          <a:bodyPr wrap="none">
-            <a:spAutoFit/>
-          </a:bodyPr>
-          <a:lstStyle/>
-          <a:p/>
-          <a:p>
-            <a:pPr>
-              <a:defRPr sz="1400">
-                <a:solidFill>
-                  <a:srgbClr val="C06040"/>
-                </a:solidFill>
-              </a:defRPr>
-            </a:pPr>
-            <a:r>
-              <a:t>* 本页为【演示数据】，仅用于验证链路</a:t>
+              <a:t>2026-09-30  ·  15 个商品</a:t>
             </a:r>
           </a:p>
         </p:txBody>
@@ -3219,47 +3188,47 @@
               <a:defRPr sz="1800" b="1"/>
             </a:pPr>
             <a:r>
-              <a:t>#9  [演示] 摸金陪玩 同行款 3号 摸金陪玩装备</a:t>
-            </a:r>
-          </a:p>
-          <a:p>
-            <a:pPr>
-              <a:defRPr sz="1400"/>
-            </a:pPr>
-            <a:r>
-              <a:t>价格：24.9    销量/想要：300</a:t>
-            </a:r>
-          </a:p>
-          <a:p>
-            <a:pPr>
-              <a:defRPr sz="1400"/>
-            </a:pPr>
-            <a:r>
-              <a:t>店铺/卖家：演示店铺3    发货地：浙江杭州</a:t>
-            </a:r>
-          </a:p>
-          <a:p>
-            <a:pPr>
-              <a:defRPr sz="1400"/>
-            </a:pPr>
-            <a:r>
-              <a:t>SKU：详情页为演示地址或无详情链接</a:t>
-            </a:r>
-          </a:p>
-          <a:p>
-            <a:pPr>
-              <a:defRPr sz="1400"/>
-            </a:pPr>
-            <a:r>
-              <a:t>卖点：装备包撤离、首单免费</a:t>
-            </a:r>
-          </a:p>
-          <a:p>
-            <a:pPr>
-              <a:defRPr sz="1400"/>
-            </a:pPr>
-            <a:r>
-              <a:t>链接：https://example.invalid/demo/taobao/9</a:t>
+              <a:t>#9  【自動充值】超自然行動組60 300 680 980 1980 6480金磚充值</a:t>
+            </a:r>
+          </a:p>
+          <a:p>
+            <a:pPr>
+              <a:defRPr sz="1400"/>
+            </a:pPr>
+            <a:r>
+              <a:t>价格：6.5    销量/想要：9</a:t>
+            </a:r>
+          </a:p>
+          <a:p>
+            <a:pPr>
+              <a:defRPr sz="1400"/>
+            </a:pPr>
+            <a:r>
+              <a:t>店铺/卖家：槓掌生活服務專營店    发货地：</a:t>
+            </a:r>
+          </a:p>
+          <a:p>
+            <a:pPr>
+              <a:defRPr sz="1400"/>
+            </a:pPr>
+            <a:r>
+              <a:t>SKU：详情页无SKU区块或需登录</a:t>
+            </a:r>
+          </a:p>
+          <a:p>
+            <a:pPr>
+              <a:defRPr sz="1400"/>
+            </a:pPr>
+            <a:r>
+              <a:t>卖点：待核验</a:t>
+            </a:r>
+          </a:p>
+          <a:p>
+            <a:pPr>
+              <a:defRPr sz="1400"/>
+            </a:pPr>
+            <a:r>
+              <a:t>链接：https://world.taobao.com/item/1029942448279.htm</a:t>
             </a:r>
           </a:p>
         </p:txBody>
@@ -3309,47 +3278,497 @@
               <a:defRPr sz="1800" b="1"/>
             </a:pPr>
             <a:r>
-              <a:t>#10  [演示] 超自然行动组 同行款 1号 摸金陪玩装备</a:t>
-            </a:r>
-          </a:p>
-          <a:p>
-            <a:pPr>
-              <a:defRPr sz="1400"/>
-            </a:pPr>
-            <a:r>
-              <a:t>价格：14.9    销量/想要：100</a:t>
-            </a:r>
-          </a:p>
-          <a:p>
-            <a:pPr>
-              <a:defRPr sz="1400"/>
-            </a:pPr>
-            <a:r>
-              <a:t>店铺/卖家：演示店铺1    发货地：浙江杭州</a:t>
-            </a:r>
-          </a:p>
-          <a:p>
-            <a:pPr>
-              <a:defRPr sz="1400"/>
-            </a:pPr>
-            <a:r>
-              <a:t>SKU：详情页为演示地址或无详情链接</a:t>
-            </a:r>
-          </a:p>
-          <a:p>
-            <a:pPr>
-              <a:defRPr sz="1400"/>
-            </a:pPr>
-            <a:r>
-              <a:t>卖点：装备包撤离、首单免费</a:t>
-            </a:r>
-          </a:p>
-          <a:p>
-            <a:pPr>
-              <a:defRPr sz="1400"/>
-            </a:pPr>
-            <a:r>
-              <a:t>链接：https://example.invalid/demo/taobao/10</a:t>
+              <a:t>#10  超自然行動組金磚代充 30元316金磚 工號充值 活動獎勵同步ID直充</a:t>
+            </a:r>
+          </a:p>
+          <a:p>
+            <a:pPr>
+              <a:defRPr sz="1400"/>
+            </a:pPr>
+            <a:r>
+              <a:t>价格：25.98    销量/想要：10</a:t>
+            </a:r>
+          </a:p>
+          <a:p>
+            <a:pPr>
+              <a:defRPr sz="1400"/>
+            </a:pPr>
+            <a:r>
+              <a:t>店铺/卖家：鼎貴遊戲    发货地：</a:t>
+            </a:r>
+          </a:p>
+          <a:p>
+            <a:pPr>
+              <a:defRPr sz="1400"/>
+            </a:pPr>
+            <a:r>
+              <a:t>SKU：详情页无SKU区块或需登录</a:t>
+            </a:r>
+          </a:p>
+          <a:p>
+            <a:pPr>
+              <a:defRPr sz="1400"/>
+            </a:pPr>
+            <a:r>
+              <a:t>卖点：待核验</a:t>
+            </a:r>
+          </a:p>
+          <a:p>
+            <a:pPr>
+              <a:defRPr sz="1400"/>
+            </a:pPr>
+            <a:r>
+              <a:t>链接：https://world.taobao.com/item/1065154775616.htm</a:t>
+            </a:r>
+          </a:p>
+        </p:txBody>
+      </p:sp>
+    </p:spTree>
+  </p:cSld>
+  <p:clrMapOvr>
+    <a:masterClrMapping/>
+  </p:clrMapOvr>
+</p:sld>
+</file>
+
+<file path=ppt/slides/slide12.xml><?xml version="1.0" encoding="utf-8"?>
+<p:sld xmlns:a="http://schemas.openxmlformats.org/drawingml/2006/main" xmlns:p="http://schemas.openxmlformats.org/presentationml/2006/main" xmlns:r="http://schemas.openxmlformats.org/officeDocument/2006/relationships">
+  <p:cSld>
+    <p:spTree>
+      <p:nvGrpSpPr>
+        <p:cNvPr id="1" name=""/>
+        <p:cNvGrpSpPr/>
+        <p:nvPr/>
+      </p:nvGrpSpPr>
+      <p:grpSpPr/>
+      <p:sp>
+        <p:nvSpPr>
+          <p:cNvPr id="2" name="TextBox 1"/>
+          <p:cNvSpPr txBox="1"/>
+          <p:nvPr/>
+        </p:nvSpPr>
+        <p:spPr>
+          <a:xfrm>
+            <a:off x="548640" y="365760"/>
+            <a:ext cx="11064240" cy="6126480"/>
+          </a:xfrm>
+          <a:prstGeom prst="rect">
+            <a:avLst/>
+          </a:prstGeom>
+          <a:noFill/>
+        </p:spPr>
+        <p:txBody>
+          <a:bodyPr wrap="square">
+            <a:spAutoFit/>
+          </a:bodyPr>
+          <a:lstStyle/>
+          <a:p/>
+          <a:p>
+            <a:pPr>
+              <a:defRPr sz="1800" b="1"/>
+            </a:pPr>
+            <a:r>
+              <a:t>#11  超自然行動組剷剷幣號剷剷幣帳號管服手機PC通用可換綁1億剷剷幣</a:t>
+            </a:r>
+          </a:p>
+          <a:p>
+            <a:pPr>
+              <a:defRPr sz="1400"/>
+            </a:pPr>
+            <a:r>
+              <a:t>价格：10    销量/想要：11</a:t>
+            </a:r>
+          </a:p>
+          <a:p>
+            <a:pPr>
+              <a:defRPr sz="1400"/>
+            </a:pPr>
+            <a:r>
+              <a:t>店铺/卖家：樂享遊戲工作室    发货地：</a:t>
+            </a:r>
+          </a:p>
+          <a:p>
+            <a:pPr>
+              <a:defRPr sz="1400"/>
+            </a:pPr>
+            <a:r>
+              <a:t>SKU：详情页无SKU区块或需登录</a:t>
+            </a:r>
+          </a:p>
+          <a:p>
+            <a:pPr>
+              <a:defRPr sz="1400"/>
+            </a:pPr>
+            <a:r>
+              <a:t>卖点：待核验</a:t>
+            </a:r>
+          </a:p>
+          <a:p>
+            <a:pPr>
+              <a:defRPr sz="1400"/>
+            </a:pPr>
+            <a:r>
+              <a:t>链接：https://world.taobao.com/item/1063547557024.htm</a:t>
+            </a:r>
+          </a:p>
+        </p:txBody>
+      </p:sp>
+    </p:spTree>
+  </p:cSld>
+  <p:clrMapOvr>
+    <a:masterClrMapping/>
+  </p:clrMapOvr>
+</p:sld>
+</file>
+
+<file path=ppt/slides/slide13.xml><?xml version="1.0" encoding="utf-8"?>
+<p:sld xmlns:a="http://schemas.openxmlformats.org/drawingml/2006/main" xmlns:p="http://schemas.openxmlformats.org/presentationml/2006/main" xmlns:r="http://schemas.openxmlformats.org/officeDocument/2006/relationships">
+  <p:cSld>
+    <p:spTree>
+      <p:nvGrpSpPr>
+        <p:cNvPr id="1" name=""/>
+        <p:cNvGrpSpPr/>
+        <p:nvPr/>
+      </p:nvGrpSpPr>
+      <p:grpSpPr/>
+      <p:sp>
+        <p:nvSpPr>
+          <p:cNvPr id="2" name="TextBox 1"/>
+          <p:cNvSpPr txBox="1"/>
+          <p:nvPr/>
+        </p:nvSpPr>
+        <p:spPr>
+          <a:xfrm>
+            <a:off x="548640" y="365760"/>
+            <a:ext cx="11064240" cy="6126480"/>
+          </a:xfrm>
+          <a:prstGeom prst="rect">
+            <a:avLst/>
+          </a:prstGeom>
+          <a:noFill/>
+        </p:spPr>
+        <p:txBody>
+          <a:bodyPr wrap="square">
+            <a:spAutoFit/>
+          </a:bodyPr>
+          <a:lstStyle/>
+          <a:p/>
+          <a:p>
+            <a:pPr>
+              <a:defRPr sz="1800" b="1"/>
+            </a:pPr>
+            <a:r>
+              <a:t>#12  【自動充值】超自然行動組10 60 300 680 980 1980 6480金磚充值</a:t>
+            </a:r>
+          </a:p>
+          <a:p>
+            <a:pPr>
+              <a:defRPr sz="1400"/>
+            </a:pPr>
+            <a:r>
+              <a:t>价格：1.3    销量/想要：12</a:t>
+            </a:r>
+          </a:p>
+          <a:p>
+            <a:pPr>
+              <a:defRPr sz="1400"/>
+            </a:pPr>
+            <a:r>
+              <a:t>店铺/卖家：槓掌生活服務專營店    发货地：</a:t>
+            </a:r>
+          </a:p>
+          <a:p>
+            <a:pPr>
+              <a:defRPr sz="1400"/>
+            </a:pPr>
+            <a:r>
+              <a:t>SKU：详情页无SKU区块或需登录</a:t>
+            </a:r>
+          </a:p>
+          <a:p>
+            <a:pPr>
+              <a:defRPr sz="1400"/>
+            </a:pPr>
+            <a:r>
+              <a:t>卖点：待核验</a:t>
+            </a:r>
+          </a:p>
+          <a:p>
+            <a:pPr>
+              <a:defRPr sz="1400"/>
+            </a:pPr>
+            <a:r>
+              <a:t>链接：https://world.taobao.com/item/1027545407774.htm</a:t>
+            </a:r>
+          </a:p>
+        </p:txBody>
+      </p:sp>
+    </p:spTree>
+  </p:cSld>
+  <p:clrMapOvr>
+    <a:masterClrMapping/>
+  </p:clrMapOvr>
+</p:sld>
+</file>
+
+<file path=ppt/slides/slide14.xml><?xml version="1.0" encoding="utf-8"?>
+<p:sld xmlns:a="http://schemas.openxmlformats.org/drawingml/2006/main" xmlns:p="http://schemas.openxmlformats.org/presentationml/2006/main" xmlns:r="http://schemas.openxmlformats.org/officeDocument/2006/relationships">
+  <p:cSld>
+    <p:spTree>
+      <p:nvGrpSpPr>
+        <p:cNvPr id="1" name=""/>
+        <p:cNvGrpSpPr/>
+        <p:nvPr/>
+      </p:nvGrpSpPr>
+      <p:grpSpPr/>
+      <p:sp>
+        <p:nvSpPr>
+          <p:cNvPr id="2" name="TextBox 1"/>
+          <p:cNvSpPr txBox="1"/>
+          <p:nvPr/>
+        </p:nvSpPr>
+        <p:spPr>
+          <a:xfrm>
+            <a:off x="548640" y="365760"/>
+            <a:ext cx="11064240" cy="6126480"/>
+          </a:xfrm>
+          <a:prstGeom prst="rect">
+            <a:avLst/>
+          </a:prstGeom>
+          <a:noFill/>
+        </p:spPr>
+        <p:txBody>
+          <a:bodyPr wrap="square">
+            <a:spAutoFit/>
+          </a:bodyPr>
+          <a:lstStyle/>
+          <a:p/>
+          <a:p>
+            <a:pPr>
+              <a:defRPr sz="1800" b="1"/>
+            </a:pPr>
+            <a:r>
+              <a:t>#13  超自然行動組剷剷幣號1000w-1億可免費改名可換綁</a:t>
+            </a:r>
+          </a:p>
+          <a:p>
+            <a:pPr>
+              <a:defRPr sz="1400"/>
+            </a:pPr>
+            <a:r>
+              <a:t>价格：0.8    销量/想要：13</a:t>
+            </a:r>
+          </a:p>
+          <a:p>
+            <a:pPr>
+              <a:defRPr sz="1400"/>
+            </a:pPr>
+            <a:r>
+              <a:t>店铺/卖家：鵬鵬超自然小店    发货地：</a:t>
+            </a:r>
+          </a:p>
+          <a:p>
+            <a:pPr>
+              <a:defRPr sz="1400"/>
+            </a:pPr>
+            <a:r>
+              <a:t>SKU：详情页无SKU区块或需登录</a:t>
+            </a:r>
+          </a:p>
+          <a:p>
+            <a:pPr>
+              <a:defRPr sz="1400"/>
+            </a:pPr>
+            <a:r>
+              <a:t>卖点：待核验</a:t>
+            </a:r>
+          </a:p>
+          <a:p>
+            <a:pPr>
+              <a:defRPr sz="1400"/>
+            </a:pPr>
+            <a:r>
+              <a:t>链接：https://world.taobao.com/item/1057307932072.htm</a:t>
+            </a:r>
+          </a:p>
+        </p:txBody>
+      </p:sp>
+    </p:spTree>
+  </p:cSld>
+  <p:clrMapOvr>
+    <a:masterClrMapping/>
+  </p:clrMapOvr>
+</p:sld>
+</file>
+
+<file path=ppt/slides/slide15.xml><?xml version="1.0" encoding="utf-8"?>
+<p:sld xmlns:a="http://schemas.openxmlformats.org/drawingml/2006/main" xmlns:p="http://schemas.openxmlformats.org/presentationml/2006/main" xmlns:r="http://schemas.openxmlformats.org/officeDocument/2006/relationships">
+  <p:cSld>
+    <p:spTree>
+      <p:nvGrpSpPr>
+        <p:cNvPr id="1" name=""/>
+        <p:cNvGrpSpPr/>
+        <p:nvPr/>
+      </p:nvGrpSpPr>
+      <p:grpSpPr/>
+      <p:sp>
+        <p:nvSpPr>
+          <p:cNvPr id="2" name="TextBox 1"/>
+          <p:cNvSpPr txBox="1"/>
+          <p:nvPr/>
+        </p:nvSpPr>
+        <p:spPr>
+          <a:xfrm>
+            <a:off x="548640" y="365760"/>
+            <a:ext cx="11064240" cy="6126480"/>
+          </a:xfrm>
+          <a:prstGeom prst="rect">
+            <a:avLst/>
+          </a:prstGeom>
+          <a:noFill/>
+        </p:spPr>
+        <p:txBody>
+          <a:bodyPr wrap="square">
+            <a:spAutoFit/>
+          </a:bodyPr>
+          <a:lstStyle/>
+          <a:p/>
+          <a:p>
+            <a:pPr>
+              <a:defRPr sz="1800" b="1"/>
+            </a:pPr>
+            <a:r>
+              <a:t>#14  【自動充值】超自然行動組10 60 300 680 980 1980 6480金磚充值</a:t>
+            </a:r>
+          </a:p>
+          <a:p>
+            <a:pPr>
+              <a:defRPr sz="1400"/>
+            </a:pPr>
+            <a:r>
+              <a:t>价格：1.3    销量/想要：14</a:t>
+            </a:r>
+          </a:p>
+          <a:p>
+            <a:pPr>
+              <a:defRPr sz="1400"/>
+            </a:pPr>
+            <a:r>
+              <a:t>店铺/卖家：西玩網路遊戲點數卡專營店    发货地：</a:t>
+            </a:r>
+          </a:p>
+          <a:p>
+            <a:pPr>
+              <a:defRPr sz="1400"/>
+            </a:pPr>
+            <a:r>
+              <a:t>SKU：详情页无SKU区块或需登录</a:t>
+            </a:r>
+          </a:p>
+          <a:p>
+            <a:pPr>
+              <a:defRPr sz="1400"/>
+            </a:pPr>
+            <a:r>
+              <a:t>卖点：待核验</a:t>
+            </a:r>
+          </a:p>
+          <a:p>
+            <a:pPr>
+              <a:defRPr sz="1400"/>
+            </a:pPr>
+            <a:r>
+              <a:t>链接：https://world.taobao.com/item/1031707681736.htm</a:t>
+            </a:r>
+          </a:p>
+        </p:txBody>
+      </p:sp>
+    </p:spTree>
+  </p:cSld>
+  <p:clrMapOvr>
+    <a:masterClrMapping/>
+  </p:clrMapOvr>
+</p:sld>
+</file>
+
+<file path=ppt/slides/slide16.xml><?xml version="1.0" encoding="utf-8"?>
+<p:sld xmlns:a="http://schemas.openxmlformats.org/drawingml/2006/main" xmlns:p="http://schemas.openxmlformats.org/presentationml/2006/main" xmlns:r="http://schemas.openxmlformats.org/officeDocument/2006/relationships">
+  <p:cSld>
+    <p:spTree>
+      <p:nvGrpSpPr>
+        <p:cNvPr id="1" name=""/>
+        <p:cNvGrpSpPr/>
+        <p:nvPr/>
+      </p:nvGrpSpPr>
+      <p:grpSpPr/>
+      <p:sp>
+        <p:nvSpPr>
+          <p:cNvPr id="2" name="TextBox 1"/>
+          <p:cNvSpPr txBox="1"/>
+          <p:nvPr/>
+        </p:nvSpPr>
+        <p:spPr>
+          <a:xfrm>
+            <a:off x="548640" y="365760"/>
+            <a:ext cx="11064240" cy="6126480"/>
+          </a:xfrm>
+          <a:prstGeom prst="rect">
+            <a:avLst/>
+          </a:prstGeom>
+          <a:noFill/>
+        </p:spPr>
+        <p:txBody>
+          <a:bodyPr wrap="square">
+            <a:spAutoFit/>
+          </a:bodyPr>
+          <a:lstStyle/>
+          <a:p/>
+          <a:p>
+            <a:pPr>
+              <a:defRPr sz="1800" b="1"/>
+            </a:pPr>
+            <a:r>
+              <a:t>#15  超自然行動組科技輔助腳本 支持手遊 模擬器 直裝最新版本</a:t>
+            </a:r>
+          </a:p>
+          <a:p>
+            <a:pPr>
+              <a:defRPr sz="1400"/>
+            </a:pPr>
+            <a:r>
+              <a:t>价格：1    销量/想要：15</a:t>
+            </a:r>
+          </a:p>
+          <a:p>
+            <a:pPr>
+              <a:defRPr sz="1400"/>
+            </a:pPr>
+            <a:r>
+              <a:t>店铺/卖家：Mod手遊    发货地：</a:t>
+            </a:r>
+          </a:p>
+          <a:p>
+            <a:pPr>
+              <a:defRPr sz="1400"/>
+            </a:pPr>
+            <a:r>
+              <a:t>SKU：详情页无SKU区块或需登录</a:t>
+            </a:r>
+          </a:p>
+          <a:p>
+            <a:pPr>
+              <a:defRPr sz="1400"/>
+            </a:pPr>
+            <a:r>
+              <a:t>卖点：待核验</a:t>
+            </a:r>
+          </a:p>
+          <a:p>
+            <a:pPr>
+              <a:defRPr sz="1400"/>
+            </a:pPr>
+            <a:r>
+              <a:t>链接：https://world.taobao.com/item/976786028886.htm</a:t>
             </a:r>
           </a:p>
         </p:txBody>
@@ -3399,47 +3818,47 @@
               <a:defRPr sz="1800" b="1"/>
             </a:pPr>
             <a:r>
-              <a:t>#1  [演示] 超自然行动组摸金陪 同行款 1号 摸金陪玩装备</a:t>
-            </a:r>
-          </a:p>
-          <a:p>
-            <a:pPr>
-              <a:defRPr sz="1400"/>
-            </a:pPr>
-            <a:r>
-              <a:t>价格：14.9    销量/想要：100</a:t>
-            </a:r>
-          </a:p>
-          <a:p>
-            <a:pPr>
-              <a:defRPr sz="1400"/>
-            </a:pPr>
-            <a:r>
-              <a:t>店铺/卖家：演示店铺1    发货地：浙江杭州</a:t>
-            </a:r>
-          </a:p>
-          <a:p>
-            <a:pPr>
-              <a:defRPr sz="1400"/>
-            </a:pPr>
-            <a:r>
-              <a:t>SKU：详情页为演示地址或无详情链接</a:t>
-            </a:r>
-          </a:p>
-          <a:p>
-            <a:pPr>
-              <a:defRPr sz="1400"/>
-            </a:pPr>
-            <a:r>
-              <a:t>卖点：装备包撤离、首单免费</a:t>
-            </a:r>
-          </a:p>
-          <a:p>
-            <a:pPr>
-              <a:defRPr sz="1400"/>
-            </a:pPr>
-            <a:r>
-              <a:t>链接：https://example.invalid/demo/taobao/1</a:t>
+              <a:t>#1  【現貨】超自然行動組 怪怪奇奇系列 馬口鐵徽章 吧唧 官谷 周邊</a:t>
+            </a:r>
+          </a:p>
+          <a:p>
+            <a:pPr>
+              <a:defRPr sz="1400"/>
+            </a:pPr>
+            <a:r>
+              <a:t>价格：15    销量/想要：1</a:t>
+            </a:r>
+          </a:p>
+          <a:p>
+            <a:pPr>
+              <a:defRPr sz="1400"/>
+            </a:pPr>
+            <a:r>
+              <a:t>店铺/卖家：超自然行動組旗艦店    发货地：</a:t>
+            </a:r>
+          </a:p>
+          <a:p>
+            <a:pPr>
+              <a:defRPr sz="1400"/>
+            </a:pPr>
+            <a:r>
+              <a:t>SKU：详情页无SKU区块或需登录</a:t>
+            </a:r>
+          </a:p>
+          <a:p>
+            <a:pPr>
+              <a:defRPr sz="1400"/>
+            </a:pPr>
+            <a:r>
+              <a:t>卖点：待核验</a:t>
+            </a:r>
+          </a:p>
+          <a:p>
+            <a:pPr>
+              <a:defRPr sz="1400"/>
+            </a:pPr>
+            <a:r>
+              <a:t>链接：https://world.taobao.com/item/1036383446543.htm</a:t>
             </a:r>
           </a:p>
         </p:txBody>
@@ -3489,47 +3908,47 @@
               <a:defRPr sz="1800" b="1"/>
             </a:pPr>
             <a:r>
-              <a:t>#2  [演示] 超自然行动组摸金陪 同行款 2号 摸金陪玩装备</a:t>
-            </a:r>
-          </a:p>
-          <a:p>
-            <a:pPr>
-              <a:defRPr sz="1400"/>
-            </a:pPr>
-            <a:r>
-              <a:t>价格：19.9    销量/想要：200</a:t>
-            </a:r>
-          </a:p>
-          <a:p>
-            <a:pPr>
-              <a:defRPr sz="1400"/>
-            </a:pPr>
-            <a:r>
-              <a:t>店铺/卖家：演示店铺2    发货地：浙江杭州</a:t>
-            </a:r>
-          </a:p>
-          <a:p>
-            <a:pPr>
-              <a:defRPr sz="1400"/>
-            </a:pPr>
-            <a:r>
-              <a:t>SKU：详情页为演示地址或无详情链接</a:t>
-            </a:r>
-          </a:p>
-          <a:p>
-            <a:pPr>
-              <a:defRPr sz="1400"/>
-            </a:pPr>
-            <a:r>
-              <a:t>卖点：装备包撤离、首单免费</a:t>
-            </a:r>
-          </a:p>
-          <a:p>
-            <a:pPr>
-              <a:defRPr sz="1400"/>
-            </a:pPr>
-            <a:r>
-              <a:t>链接：https://example.invalid/demo/taobao/2</a:t>
+              <a:t>#2  正版卡遊超自然行動組卡片趣影包2元包收藏卡牌兩元卡包遊戲周邊</a:t>
+            </a:r>
+          </a:p>
+          <a:p>
+            <a:pPr>
+              <a:defRPr sz="1400"/>
+            </a:pPr>
+            <a:r>
+              <a:t>价格：39.8    销量/想要：2</a:t>
+            </a:r>
+          </a:p>
+          <a:p>
+            <a:pPr>
+              <a:defRPr sz="1400"/>
+            </a:pPr>
+            <a:r>
+              <a:t>店铺/卖家：赤寶母嬰專營店    发货地：</a:t>
+            </a:r>
+          </a:p>
+          <a:p>
+            <a:pPr>
+              <a:defRPr sz="1400"/>
+            </a:pPr>
+            <a:r>
+              <a:t>SKU：详情页无SKU区块或需登录</a:t>
+            </a:r>
+          </a:p>
+          <a:p>
+            <a:pPr>
+              <a:defRPr sz="1400"/>
+            </a:pPr>
+            <a:r>
+              <a:t>卖点：包</a:t>
+            </a:r>
+          </a:p>
+          <a:p>
+            <a:pPr>
+              <a:defRPr sz="1400"/>
+            </a:pPr>
+            <a:r>
+              <a:t>链接：https://world.taobao.com/item/1080822682056.htm</a:t>
             </a:r>
           </a:p>
         </p:txBody>
@@ -3579,47 +3998,47 @@
               <a:defRPr sz="1800" b="1"/>
             </a:pPr>
             <a:r>
-              <a:t>#3  [演示] 超自然行动组摸金陪 同行款 3号 摸金陪玩装备</a:t>
-            </a:r>
-          </a:p>
-          <a:p>
-            <a:pPr>
-              <a:defRPr sz="1400"/>
-            </a:pPr>
-            <a:r>
-              <a:t>价格：24.9    销量/想要：300</a:t>
-            </a:r>
-          </a:p>
-          <a:p>
-            <a:pPr>
-              <a:defRPr sz="1400"/>
-            </a:pPr>
-            <a:r>
-              <a:t>店铺/卖家：演示店铺3    发货地：浙江杭州</a:t>
-            </a:r>
-          </a:p>
-          <a:p>
-            <a:pPr>
-              <a:defRPr sz="1400"/>
-            </a:pPr>
-            <a:r>
-              <a:t>SKU：详情页为演示地址或无详情链接</a:t>
-            </a:r>
-          </a:p>
-          <a:p>
-            <a:pPr>
-              <a:defRPr sz="1400"/>
-            </a:pPr>
-            <a:r>
-              <a:t>卖点：装备包撤离、首单免费</a:t>
-            </a:r>
-          </a:p>
-          <a:p>
-            <a:pPr>
-              <a:defRPr sz="1400"/>
-            </a:pPr>
-            <a:r>
-              <a:t>链接：https://example.invalid/demo/taobao/3</a:t>
+              <a:t>#3  超自然行動組剷剷幣號初始號超自然1億剷剷幣號新手號可自動發貨</a:t>
+            </a:r>
+          </a:p>
+          <a:p>
+            <a:pPr>
+              <a:defRPr sz="1400"/>
+            </a:pPr>
+            <a:r>
+              <a:t>价格：10    销量/想要：3</a:t>
+            </a:r>
+          </a:p>
+          <a:p>
+            <a:pPr>
+              <a:defRPr sz="1400"/>
+            </a:pPr>
+            <a:r>
+              <a:t>店铺/卖家：樂享遊戲工作室    发货地：</a:t>
+            </a:r>
+          </a:p>
+          <a:p>
+            <a:pPr>
+              <a:defRPr sz="1400"/>
+            </a:pPr>
+            <a:r>
+              <a:t>SKU：详情页无SKU区块或需登录</a:t>
+            </a:r>
+          </a:p>
+          <a:p>
+            <a:pPr>
+              <a:defRPr sz="1400"/>
+            </a:pPr>
+            <a:r>
+              <a:t>卖点：待核验</a:t>
+            </a:r>
+          </a:p>
+          <a:p>
+            <a:pPr>
+              <a:defRPr sz="1400"/>
+            </a:pPr>
+            <a:r>
+              <a:t>链接：https://world.taobao.com/item/1002598902343.htm</a:t>
             </a:r>
           </a:p>
         </p:txBody>
@@ -3669,47 +4088,47 @@
               <a:defRPr sz="1800" b="1"/>
             </a:pPr>
             <a:r>
-              <a:t>#4  [演示] 超自然行动组陪玩 同行款 1号 摸金陪玩装备</a:t>
-            </a:r>
-          </a:p>
-          <a:p>
-            <a:pPr>
-              <a:defRPr sz="1400"/>
-            </a:pPr>
-            <a:r>
-              <a:t>价格：14.9    销量/想要：100</a:t>
-            </a:r>
-          </a:p>
-          <a:p>
-            <a:pPr>
-              <a:defRPr sz="1400"/>
-            </a:pPr>
-            <a:r>
-              <a:t>店铺/卖家：演示店铺1    发货地：浙江杭州</a:t>
-            </a:r>
-          </a:p>
-          <a:p>
-            <a:pPr>
-              <a:defRPr sz="1400"/>
-            </a:pPr>
-            <a:r>
-              <a:t>SKU：详情页为演示地址或无详情链接</a:t>
-            </a:r>
-          </a:p>
-          <a:p>
-            <a:pPr>
-              <a:defRPr sz="1400"/>
-            </a:pPr>
-            <a:r>
-              <a:t>卖点：装备包撤离、首单免费</a:t>
-            </a:r>
-          </a:p>
-          <a:p>
-            <a:pPr>
-              <a:defRPr sz="1400"/>
-            </a:pPr>
-            <a:r>
-              <a:t>链接：https://example.invalid/demo/taobao/4</a:t>
+              <a:t>#4  【自動充值】超自然行動組10 60 300 680 980 1980 6480金磚充值</a:t>
+            </a:r>
+          </a:p>
+          <a:p>
+            <a:pPr>
+              <a:defRPr sz="1400"/>
+            </a:pPr>
+            <a:r>
+              <a:t>价格：1.3    销量/想要：4</a:t>
+            </a:r>
+          </a:p>
+          <a:p>
+            <a:pPr>
+              <a:defRPr sz="1400"/>
+            </a:pPr>
+            <a:r>
+              <a:t>店铺/卖家：西玩網路遊戲點數卡專營店    发货地：</a:t>
+            </a:r>
+          </a:p>
+          <a:p>
+            <a:pPr>
+              <a:defRPr sz="1400"/>
+            </a:pPr>
+            <a:r>
+              <a:t>SKU：详情页无SKU区块或需登录</a:t>
+            </a:r>
+          </a:p>
+          <a:p>
+            <a:pPr>
+              <a:defRPr sz="1400"/>
+            </a:pPr>
+            <a:r>
+              <a:t>卖点：待核验</a:t>
+            </a:r>
+          </a:p>
+          <a:p>
+            <a:pPr>
+              <a:defRPr sz="1400"/>
+            </a:pPr>
+            <a:r>
+              <a:t>链接：https://world.taobao.com/item/1030111739006.htm</a:t>
             </a:r>
           </a:p>
         </p:txBody>
@@ -3759,47 +4178,47 @@
               <a:defRPr sz="1800" b="1"/>
             </a:pPr>
             <a:r>
-              <a:t>#5  [演示] 超自然行动组陪玩 同行款 2号 摸金陪玩装备</a:t>
-            </a:r>
-          </a:p>
-          <a:p>
-            <a:pPr>
-              <a:defRPr sz="1400"/>
-            </a:pPr>
-            <a:r>
-              <a:t>价格：19.9    销量/想要：200</a:t>
-            </a:r>
-          </a:p>
-          <a:p>
-            <a:pPr>
-              <a:defRPr sz="1400"/>
-            </a:pPr>
-            <a:r>
-              <a:t>店铺/卖家：演示店铺2    发货地：浙江杭州</a:t>
-            </a:r>
-          </a:p>
-          <a:p>
-            <a:pPr>
-              <a:defRPr sz="1400"/>
-            </a:pPr>
-            <a:r>
-              <a:t>SKU：详情页为演示地址或无详情链接</a:t>
-            </a:r>
-          </a:p>
-          <a:p>
-            <a:pPr>
-              <a:defRPr sz="1400"/>
-            </a:pPr>
-            <a:r>
-              <a:t>卖点：装备包撤离、首单免费</a:t>
-            </a:r>
-          </a:p>
-          <a:p>
-            <a:pPr>
-              <a:defRPr sz="1400"/>
-            </a:pPr>
-            <a:r>
-              <a:t>链接：https://example.invalid/demo/taobao/5</a:t>
+              <a:t>#5  超自然行動組剷剷號資源號安卓蘋果官服號可換綁1億剷剷幣帳號</a:t>
+            </a:r>
+          </a:p>
+          <a:p>
+            <a:pPr>
+              <a:defRPr sz="1400"/>
+            </a:pPr>
+            <a:r>
+              <a:t>价格：0.6    销量/想要：5</a:t>
+            </a:r>
+          </a:p>
+          <a:p>
+            <a:pPr>
+              <a:defRPr sz="1400"/>
+            </a:pPr>
+            <a:r>
+              <a:t>店铺/卖家：002光遇愛心    发货地：</a:t>
+            </a:r>
+          </a:p>
+          <a:p>
+            <a:pPr>
+              <a:defRPr sz="1400"/>
+            </a:pPr>
+            <a:r>
+              <a:t>SKU：详情页无SKU区块或需登录</a:t>
+            </a:r>
+          </a:p>
+          <a:p>
+            <a:pPr>
+              <a:defRPr sz="1400"/>
+            </a:pPr>
+            <a:r>
+              <a:t>卖点：待核验</a:t>
+            </a:r>
+          </a:p>
+          <a:p>
+            <a:pPr>
+              <a:defRPr sz="1400"/>
+            </a:pPr>
+            <a:r>
+              <a:t>链接：https://world.taobao.com/item/992441134148.htm</a:t>
             </a:r>
           </a:p>
         </p:txBody>
@@ -3849,47 +4268,47 @@
               <a:defRPr sz="1800" b="1"/>
             </a:pPr>
             <a:r>
-              <a:t>#6  [演示] 超自然行动组陪玩 同行款 3号 摸金陪玩装备</a:t>
-            </a:r>
-          </a:p>
-          <a:p>
-            <a:pPr>
-              <a:defRPr sz="1400"/>
-            </a:pPr>
-            <a:r>
-              <a:t>价格：24.9    销量/想要：300</a:t>
-            </a:r>
-          </a:p>
-          <a:p>
-            <a:pPr>
-              <a:defRPr sz="1400"/>
-            </a:pPr>
-            <a:r>
-              <a:t>店铺/卖家：演示店铺3    发货地：浙江杭州</a:t>
-            </a:r>
-          </a:p>
-          <a:p>
-            <a:pPr>
-              <a:defRPr sz="1400"/>
-            </a:pPr>
-            <a:r>
-              <a:t>SKU：详情页为演示地址或无详情链接</a:t>
-            </a:r>
-          </a:p>
-          <a:p>
-            <a:pPr>
-              <a:defRPr sz="1400"/>
-            </a:pPr>
-            <a:r>
-              <a:t>卖点：装备包撤离、首单免费</a:t>
-            </a:r>
-          </a:p>
-          <a:p>
-            <a:pPr>
-              <a:defRPr sz="1400"/>
-            </a:pPr>
-            <a:r>
-              <a:t>链接：https://example.invalid/demo/taobao/6</a:t>
+              <a:t>#6  超自然行動組金磚代充特權卡豪華魔盒30 68 128 328 648 60</a:t>
+            </a:r>
+          </a:p>
+          <a:p>
+            <a:pPr>
+              <a:defRPr sz="1400"/>
+            </a:pPr>
+            <a:r>
+              <a:t>价格：30    销量/想要：6</a:t>
+            </a:r>
+          </a:p>
+          <a:p>
+            <a:pPr>
+              <a:defRPr sz="1400"/>
+            </a:pPr>
+            <a:r>
+              <a:t>店铺/卖家：李白遊戲充值服務    发货地：</a:t>
+            </a:r>
+          </a:p>
+          <a:p>
+            <a:pPr>
+              <a:defRPr sz="1400"/>
+            </a:pPr>
+            <a:r>
+              <a:t>SKU：详情页无SKU区块或需登录</a:t>
+            </a:r>
+          </a:p>
+          <a:p>
+            <a:pPr>
+              <a:defRPr sz="1400"/>
+            </a:pPr>
+            <a:r>
+              <a:t>卖点：待核验</a:t>
+            </a:r>
+          </a:p>
+          <a:p>
+            <a:pPr>
+              <a:defRPr sz="1400"/>
+            </a:pPr>
+            <a:r>
+              <a:t>链接：https://world.taobao.com/item/945145533254.htm</a:t>
             </a:r>
           </a:p>
         </p:txBody>
@@ -3939,47 +4358,47 @@
               <a:defRPr sz="1800" b="1"/>
             </a:pPr>
             <a:r>
-              <a:t>#7  [演示] 摸金陪玩 同行款 1号 摸金陪玩装备</a:t>
-            </a:r>
-          </a:p>
-          <a:p>
-            <a:pPr>
-              <a:defRPr sz="1400"/>
-            </a:pPr>
-            <a:r>
-              <a:t>价格：14.9    销量/想要：100</a:t>
-            </a:r>
-          </a:p>
-          <a:p>
-            <a:pPr>
-              <a:defRPr sz="1400"/>
-            </a:pPr>
-            <a:r>
-              <a:t>店铺/卖家：演示店铺1    发货地：浙江杭州</a:t>
-            </a:r>
-          </a:p>
-          <a:p>
-            <a:pPr>
-              <a:defRPr sz="1400"/>
-            </a:pPr>
-            <a:r>
-              <a:t>SKU：详情页为演示地址或无详情链接</a:t>
-            </a:r>
-          </a:p>
-          <a:p>
-            <a:pPr>
-              <a:defRPr sz="1400"/>
-            </a:pPr>
-            <a:r>
-              <a:t>卖点：装备包撤离、首单免费</a:t>
-            </a:r>
-          </a:p>
-          <a:p>
-            <a:pPr>
-              <a:defRPr sz="1400"/>
-            </a:pPr>
-            <a:r>
-              <a:t>链接：https://example.invalid/demo/taobao/7</a:t>
+              <a:t>#7  超自然行動組剷剷幣初始號1億剷剷幣號5000W新手帳號安卓蘋果官服</a:t>
+            </a:r>
+          </a:p>
+          <a:p>
+            <a:pPr>
+              <a:defRPr sz="1400"/>
+            </a:pPr>
+            <a:r>
+              <a:t>价格：1.98    销量/想要：7</a:t>
+            </a:r>
+          </a:p>
+          <a:p>
+            <a:pPr>
+              <a:defRPr sz="1400"/>
+            </a:pPr>
+            <a:r>
+              <a:t>店铺/卖家：薇薇網路遊戲雜貨店    发货地：</a:t>
+            </a:r>
+          </a:p>
+          <a:p>
+            <a:pPr>
+              <a:defRPr sz="1400"/>
+            </a:pPr>
+            <a:r>
+              <a:t>SKU：详情页无SKU区块或需登录</a:t>
+            </a:r>
+          </a:p>
+          <a:p>
+            <a:pPr>
+              <a:defRPr sz="1400"/>
+            </a:pPr>
+            <a:r>
+              <a:t>卖点：待核验</a:t>
+            </a:r>
+          </a:p>
+          <a:p>
+            <a:pPr>
+              <a:defRPr sz="1400"/>
+            </a:pPr>
+            <a:r>
+              <a:t>链接：https://world.taobao.com/item/1046229228955.htm</a:t>
             </a:r>
           </a:p>
         </p:txBody>
@@ -4029,47 +4448,47 @@
               <a:defRPr sz="1800" b="1"/>
             </a:pPr>
             <a:r>
-              <a:t>#8  [演示] 摸金陪玩 同行款 2号 摸金陪玩装备</a:t>
-            </a:r>
-          </a:p>
-          <a:p>
-            <a:pPr>
-              <a:defRPr sz="1400"/>
-            </a:pPr>
-            <a:r>
-              <a:t>价格：19.9    销量/想要：200</a:t>
-            </a:r>
-          </a:p>
-          <a:p>
-            <a:pPr>
-              <a:defRPr sz="1400"/>
-            </a:pPr>
-            <a:r>
-              <a:t>店铺/卖家：演示店铺2    发货地：浙江杭州</a:t>
-            </a:r>
-          </a:p>
-          <a:p>
-            <a:pPr>
-              <a:defRPr sz="1400"/>
-            </a:pPr>
-            <a:r>
-              <a:t>SKU：详情页为演示地址或无详情链接</a:t>
-            </a:r>
-          </a:p>
-          <a:p>
-            <a:pPr>
-              <a:defRPr sz="1400"/>
-            </a:pPr>
-            <a:r>
-              <a:t>卖点：装备包撤离、首单免费</a:t>
-            </a:r>
-          </a:p>
-          <a:p>
-            <a:pPr>
-              <a:defRPr sz="1400"/>
-            </a:pPr>
-            <a:r>
-              <a:t>链接：https://example.invalid/demo/taobao/8</a:t>
+              <a:t>#8  超自然行動組1億剷剷號資源號安卓蘋果官服號可換綁剷剷幣帳號</a:t>
+            </a:r>
+          </a:p>
+          <a:p>
+            <a:pPr>
+              <a:defRPr sz="1400"/>
+            </a:pPr>
+            <a:r>
+              <a:t>价格：0.6    销量/想要：8</a:t>
+            </a:r>
+          </a:p>
+          <a:p>
+            <a:pPr>
+              <a:defRPr sz="1400"/>
+            </a:pPr>
+            <a:r>
+              <a:t>店铺/卖家：超自然剷剷幣號    发货地：</a:t>
+            </a:r>
+          </a:p>
+          <a:p>
+            <a:pPr>
+              <a:defRPr sz="1400"/>
+            </a:pPr>
+            <a:r>
+              <a:t>SKU：详情页无SKU区块或需登录</a:t>
+            </a:r>
+          </a:p>
+          <a:p>
+            <a:pPr>
+              <a:defRPr sz="1400"/>
+            </a:pPr>
+            <a:r>
+              <a:t>卖点：待核验</a:t>
+            </a:r>
+          </a:p>
+          <a:p>
+            <a:pPr>
+              <a:defRPr sz="1400"/>
+            </a:pPr>
+            <a:r>
+              <a:t>链接：https://world.taobao.com/item/1041905004350.htm</a:t>
             </a:r>
           </a:p>
         </p:txBody>
